--- a/session-01 introduction.pptx
+++ b/session-01 introduction.pptx
@@ -4,6 +4,9 @@
   <p:sldMasterIdLst>
     <p:sldMasterId id="2147483648" r:id="rId1"/>
   </p:sldMasterIdLst>
+  <p:notesMasterIdLst>
+    <p:notesMasterId r:id="rId125"/>
+  </p:notesMasterIdLst>
   <p:sldIdLst>
     <p:sldId id="256" r:id="rId2"/>
     <p:sldId id="324" r:id="rId3"/>
@@ -234,6 +237,356 @@
 </p:presentation>
 </file>
 
+<file path=ppt/notesMasters/notesMaster1.xml><?xml version="1.0" encoding="utf-8"?>
+<p:notesMaster xmlns:a="http://schemas.openxmlformats.org/drawingml/2006/main" xmlns:r="http://schemas.openxmlformats.org/officeDocument/2006/relationships" xmlns:p="http://schemas.openxmlformats.org/presentationml/2006/main">
+  <p:cSld>
+    <p:bg>
+      <p:bgRef idx="1001">
+        <a:schemeClr val="bg1"/>
+      </p:bgRef>
+    </p:bg>
+    <p:spTree>
+      <p:nvGrpSpPr>
+        <p:cNvPr id="1" name=""/>
+        <p:cNvGrpSpPr/>
+        <p:nvPr/>
+      </p:nvGrpSpPr>
+      <p:grpSpPr>
+        <a:xfrm>
+          <a:off x="0" y="0"/>
+          <a:ext cx="0" cy="0"/>
+          <a:chOff x="0" y="0"/>
+          <a:chExt cx="0" cy="0"/>
+        </a:xfrm>
+      </p:grpSpPr>
+      <p:sp>
+        <p:nvSpPr>
+          <p:cNvPr id="2" name="Header Placeholder 1"/>
+          <p:cNvSpPr>
+            <a:spLocks noGrp="1"/>
+          </p:cNvSpPr>
+          <p:nvPr>
+            <p:ph type="hdr" sz="quarter"/>
+          </p:nvPr>
+        </p:nvSpPr>
+        <p:spPr>
+          <a:xfrm>
+            <a:off x="0" y="0"/>
+            <a:ext cx="2971800" cy="458788"/>
+          </a:xfrm>
+          <a:prstGeom prst="rect">
+            <a:avLst/>
+          </a:prstGeom>
+        </p:spPr>
+        <p:txBody>
+          <a:bodyPr vert="horz" lIns="91440" tIns="45720" rIns="91440" bIns="45720" rtlCol="0"/>
+          <a:lstStyle>
+            <a:lvl1pPr algn="l">
+              <a:defRPr sz="1200"/>
+            </a:lvl1pPr>
+          </a:lstStyle>
+          <a:p>
+            <a:endParaRPr lang="en-US"/>
+          </a:p>
+        </p:txBody>
+      </p:sp>
+      <p:sp>
+        <p:nvSpPr>
+          <p:cNvPr id="3" name="Date Placeholder 2"/>
+          <p:cNvSpPr>
+            <a:spLocks noGrp="1"/>
+          </p:cNvSpPr>
+          <p:nvPr>
+            <p:ph type="dt" idx="1"/>
+          </p:nvPr>
+        </p:nvSpPr>
+        <p:spPr>
+          <a:xfrm>
+            <a:off x="3884613" y="0"/>
+            <a:ext cx="2971800" cy="458788"/>
+          </a:xfrm>
+          <a:prstGeom prst="rect">
+            <a:avLst/>
+          </a:prstGeom>
+        </p:spPr>
+        <p:txBody>
+          <a:bodyPr vert="horz" lIns="91440" tIns="45720" rIns="91440" bIns="45720" rtlCol="0"/>
+          <a:lstStyle>
+            <a:lvl1pPr algn="r">
+              <a:defRPr sz="1200"/>
+            </a:lvl1pPr>
+          </a:lstStyle>
+          <a:p>
+            <a:fld id="{DB22BF3C-0CEC-DD44-A217-E25CB528BBDF}" type="datetimeFigureOut">
+              <a:rPr lang="en-US" smtClean="0"/>
+              <a:t>8/27/24</a:t>
+            </a:fld>
+            <a:endParaRPr lang="en-US"/>
+          </a:p>
+        </p:txBody>
+      </p:sp>
+      <p:sp>
+        <p:nvSpPr>
+          <p:cNvPr id="4" name="Slide Image Placeholder 3"/>
+          <p:cNvSpPr>
+            <a:spLocks noGrp="1" noRot="1" noChangeAspect="1"/>
+          </p:cNvSpPr>
+          <p:nvPr>
+            <p:ph type="sldImg" idx="2"/>
+          </p:nvPr>
+        </p:nvSpPr>
+        <p:spPr>
+          <a:xfrm>
+            <a:off x="685800" y="1143000"/>
+            <a:ext cx="5486400" cy="3086100"/>
+          </a:xfrm>
+          <a:prstGeom prst="rect">
+            <a:avLst/>
+          </a:prstGeom>
+          <a:noFill/>
+          <a:ln w="12700">
+            <a:solidFill>
+              <a:prstClr val="black"/>
+            </a:solidFill>
+          </a:ln>
+        </p:spPr>
+        <p:txBody>
+          <a:bodyPr vert="horz" lIns="91440" tIns="45720" rIns="91440" bIns="45720" rtlCol="0" anchor="ctr"/>
+          <a:lstStyle/>
+          <a:p>
+            <a:endParaRPr lang="en-US"/>
+          </a:p>
+        </p:txBody>
+      </p:sp>
+      <p:sp>
+        <p:nvSpPr>
+          <p:cNvPr id="5" name="Notes Placeholder 4"/>
+          <p:cNvSpPr>
+            <a:spLocks noGrp="1"/>
+          </p:cNvSpPr>
+          <p:nvPr>
+            <p:ph type="body" sz="quarter" idx="3"/>
+          </p:nvPr>
+        </p:nvSpPr>
+        <p:spPr>
+          <a:xfrm>
+            <a:off x="685800" y="4400550"/>
+            <a:ext cx="5486400" cy="3600450"/>
+          </a:xfrm>
+          <a:prstGeom prst="rect">
+            <a:avLst/>
+          </a:prstGeom>
+        </p:spPr>
+        <p:txBody>
+          <a:bodyPr vert="horz" lIns="91440" tIns="45720" rIns="91440" bIns="45720" rtlCol="0"/>
+          <a:lstStyle/>
+          <a:p>
+            <a:pPr lvl="0"/>
+            <a:r>
+              <a:rPr lang="en-GB"/>
+              <a:t>Click to edit Master text styles</a:t>
+            </a:r>
+          </a:p>
+          <a:p>
+            <a:pPr lvl="1"/>
+            <a:r>
+              <a:rPr lang="en-GB"/>
+              <a:t>Second level</a:t>
+            </a:r>
+          </a:p>
+          <a:p>
+            <a:pPr lvl="2"/>
+            <a:r>
+              <a:rPr lang="en-GB"/>
+              <a:t>Third level</a:t>
+            </a:r>
+          </a:p>
+          <a:p>
+            <a:pPr lvl="3"/>
+            <a:r>
+              <a:rPr lang="en-GB"/>
+              <a:t>Fourth level</a:t>
+            </a:r>
+          </a:p>
+          <a:p>
+            <a:pPr lvl="4"/>
+            <a:r>
+              <a:rPr lang="en-GB"/>
+              <a:t>Fifth level</a:t>
+            </a:r>
+            <a:endParaRPr lang="en-US"/>
+          </a:p>
+        </p:txBody>
+      </p:sp>
+      <p:sp>
+        <p:nvSpPr>
+          <p:cNvPr id="6" name="Footer Placeholder 5"/>
+          <p:cNvSpPr>
+            <a:spLocks noGrp="1"/>
+          </p:cNvSpPr>
+          <p:nvPr>
+            <p:ph type="ftr" sz="quarter" idx="4"/>
+          </p:nvPr>
+        </p:nvSpPr>
+        <p:spPr>
+          <a:xfrm>
+            <a:off x="0" y="8685213"/>
+            <a:ext cx="2971800" cy="458787"/>
+          </a:xfrm>
+          <a:prstGeom prst="rect">
+            <a:avLst/>
+          </a:prstGeom>
+        </p:spPr>
+        <p:txBody>
+          <a:bodyPr vert="horz" lIns="91440" tIns="45720" rIns="91440" bIns="45720" rtlCol="0" anchor="b"/>
+          <a:lstStyle>
+            <a:lvl1pPr algn="l">
+              <a:defRPr sz="1200"/>
+            </a:lvl1pPr>
+          </a:lstStyle>
+          <a:p>
+            <a:endParaRPr lang="en-US"/>
+          </a:p>
+        </p:txBody>
+      </p:sp>
+      <p:sp>
+        <p:nvSpPr>
+          <p:cNvPr id="7" name="Slide Number Placeholder 6"/>
+          <p:cNvSpPr>
+            <a:spLocks noGrp="1"/>
+          </p:cNvSpPr>
+          <p:nvPr>
+            <p:ph type="sldNum" sz="quarter" idx="5"/>
+          </p:nvPr>
+        </p:nvSpPr>
+        <p:spPr>
+          <a:xfrm>
+            <a:off x="3884613" y="8685213"/>
+            <a:ext cx="2971800" cy="458787"/>
+          </a:xfrm>
+          <a:prstGeom prst="rect">
+            <a:avLst/>
+          </a:prstGeom>
+        </p:spPr>
+        <p:txBody>
+          <a:bodyPr vert="horz" lIns="91440" tIns="45720" rIns="91440" bIns="45720" rtlCol="0" anchor="b"/>
+          <a:lstStyle>
+            <a:lvl1pPr algn="r">
+              <a:defRPr sz="1200"/>
+            </a:lvl1pPr>
+          </a:lstStyle>
+          <a:p>
+            <a:fld id="{B5A801CF-ADAD-5347-A0A7-55C8CC202EBB}" type="slidenum">
+              <a:rPr lang="en-US" smtClean="0"/>
+              <a:t>‹#›</a:t>
+            </a:fld>
+            <a:endParaRPr lang="en-US"/>
+          </a:p>
+        </p:txBody>
+      </p:sp>
+    </p:spTree>
+    <p:extLst>
+      <p:ext uri="{BB962C8B-B14F-4D97-AF65-F5344CB8AC3E}">
+        <p14:creationId xmlns:p14="http://schemas.microsoft.com/office/powerpoint/2010/main" val="256482976"/>
+      </p:ext>
+    </p:extLst>
+  </p:cSld>
+  <p:clrMap bg1="lt1" tx1="dk1" bg2="lt2" tx2="dk2" accent1="accent1" accent2="accent2" accent3="accent3" accent4="accent4" accent5="accent5" accent6="accent6" hlink="hlink" folHlink="folHlink"/>
+  <p:notesStyle>
+    <a:lvl1pPr marL="0" algn="l" defTabSz="914400" rtl="0" eaLnBrk="1" latinLnBrk="0" hangingPunct="1">
+      <a:defRPr sz="1200" kern="1200">
+        <a:solidFill>
+          <a:schemeClr val="tx1"/>
+        </a:solidFill>
+        <a:latin typeface="+mn-lt"/>
+        <a:ea typeface="+mn-ea"/>
+        <a:cs typeface="+mn-cs"/>
+      </a:defRPr>
+    </a:lvl1pPr>
+    <a:lvl2pPr marL="457200" algn="l" defTabSz="914400" rtl="0" eaLnBrk="1" latinLnBrk="0" hangingPunct="1">
+      <a:defRPr sz="1200" kern="1200">
+        <a:solidFill>
+          <a:schemeClr val="tx1"/>
+        </a:solidFill>
+        <a:latin typeface="+mn-lt"/>
+        <a:ea typeface="+mn-ea"/>
+        <a:cs typeface="+mn-cs"/>
+      </a:defRPr>
+    </a:lvl2pPr>
+    <a:lvl3pPr marL="914400" algn="l" defTabSz="914400" rtl="0" eaLnBrk="1" latinLnBrk="0" hangingPunct="1">
+      <a:defRPr sz="1200" kern="1200">
+        <a:solidFill>
+          <a:schemeClr val="tx1"/>
+        </a:solidFill>
+        <a:latin typeface="+mn-lt"/>
+        <a:ea typeface="+mn-ea"/>
+        <a:cs typeface="+mn-cs"/>
+      </a:defRPr>
+    </a:lvl3pPr>
+    <a:lvl4pPr marL="1371600" algn="l" defTabSz="914400" rtl="0" eaLnBrk="1" latinLnBrk="0" hangingPunct="1">
+      <a:defRPr sz="1200" kern="1200">
+        <a:solidFill>
+          <a:schemeClr val="tx1"/>
+        </a:solidFill>
+        <a:latin typeface="+mn-lt"/>
+        <a:ea typeface="+mn-ea"/>
+        <a:cs typeface="+mn-cs"/>
+      </a:defRPr>
+    </a:lvl4pPr>
+    <a:lvl5pPr marL="1828800" algn="l" defTabSz="914400" rtl="0" eaLnBrk="1" latinLnBrk="0" hangingPunct="1">
+      <a:defRPr sz="1200" kern="1200">
+        <a:solidFill>
+          <a:schemeClr val="tx1"/>
+        </a:solidFill>
+        <a:latin typeface="+mn-lt"/>
+        <a:ea typeface="+mn-ea"/>
+        <a:cs typeface="+mn-cs"/>
+      </a:defRPr>
+    </a:lvl5pPr>
+    <a:lvl6pPr marL="2286000" algn="l" defTabSz="914400" rtl="0" eaLnBrk="1" latinLnBrk="0" hangingPunct="1">
+      <a:defRPr sz="1200" kern="1200">
+        <a:solidFill>
+          <a:schemeClr val="tx1"/>
+        </a:solidFill>
+        <a:latin typeface="+mn-lt"/>
+        <a:ea typeface="+mn-ea"/>
+        <a:cs typeface="+mn-cs"/>
+      </a:defRPr>
+    </a:lvl6pPr>
+    <a:lvl7pPr marL="2743200" algn="l" defTabSz="914400" rtl="0" eaLnBrk="1" latinLnBrk="0" hangingPunct="1">
+      <a:defRPr sz="1200" kern="1200">
+        <a:solidFill>
+          <a:schemeClr val="tx1"/>
+        </a:solidFill>
+        <a:latin typeface="+mn-lt"/>
+        <a:ea typeface="+mn-ea"/>
+        <a:cs typeface="+mn-cs"/>
+      </a:defRPr>
+    </a:lvl7pPr>
+    <a:lvl8pPr marL="3200400" algn="l" defTabSz="914400" rtl="0" eaLnBrk="1" latinLnBrk="0" hangingPunct="1">
+      <a:defRPr sz="1200" kern="1200">
+        <a:solidFill>
+          <a:schemeClr val="tx1"/>
+        </a:solidFill>
+        <a:latin typeface="+mn-lt"/>
+        <a:ea typeface="+mn-ea"/>
+        <a:cs typeface="+mn-cs"/>
+      </a:defRPr>
+    </a:lvl8pPr>
+    <a:lvl9pPr marL="3657600" algn="l" defTabSz="914400" rtl="0" eaLnBrk="1" latinLnBrk="0" hangingPunct="1">
+      <a:defRPr sz="1200" kern="1200">
+        <a:solidFill>
+          <a:schemeClr val="tx1"/>
+        </a:solidFill>
+        <a:latin typeface="+mn-lt"/>
+        <a:ea typeface="+mn-ea"/>
+        <a:cs typeface="+mn-cs"/>
+      </a:defRPr>
+    </a:lvl9pPr>
+  </p:notesStyle>
+</p:notesMaster>
+</file>
+
 <file path=ppt/slideLayouts/slideLayout1.xml><?xml version="1.0" encoding="utf-8"?>
 <p:sldLayout xmlns:a="http://schemas.openxmlformats.org/drawingml/2006/main" xmlns:r="http://schemas.openxmlformats.org/officeDocument/2006/relationships" xmlns:p="http://schemas.openxmlformats.org/presentationml/2006/main" type="title" preserve="1">
   <p:cSld name="Title Slide">
@@ -381,9 +734,9 @@
           <a:bodyPr/>
           <a:lstStyle/>
           <a:p>
-            <a:fld id="{E38C4BA5-40C7-8F44-BE87-D1C93CB86745}" type="datetimeFigureOut">
-              <a:rPr lang="en-US" smtClean="0"/>
-              <a:t>8/8/24</a:t>
+            <a:fld id="{FEFCD539-AAE9-4B49-895E-A5B55666163D}" type="datetime1">
+              <a:rPr lang="en-IN" smtClean="0"/>
+              <a:t>27/08/24</a:t>
             </a:fld>
             <a:endParaRPr lang="en-US"/>
           </a:p>
@@ -410,7 +763,10 @@
           <a:bodyPr/>
           <a:lstStyle/>
           <a:p>
-            <a:endParaRPr lang="en-US"/>
+            <a:r>
+              <a:rPr lang="en-US"/>
+              <a:t>Dr. Naveen Kumar, Associate Professor, AIIT, AUP</a:t>
+            </a:r>
           </a:p>
         </p:txBody>
       </p:sp>
@@ -581,9 +937,9 @@
           <a:bodyPr/>
           <a:lstStyle/>
           <a:p>
-            <a:fld id="{E38C4BA5-40C7-8F44-BE87-D1C93CB86745}" type="datetimeFigureOut">
-              <a:rPr lang="en-US" smtClean="0"/>
-              <a:t>8/8/24</a:t>
+            <a:fld id="{6A9182AD-5275-5A4F-A0F3-D71ACA3579FE}" type="datetime1">
+              <a:rPr lang="en-IN" smtClean="0"/>
+              <a:t>27/08/24</a:t>
             </a:fld>
             <a:endParaRPr lang="en-US"/>
           </a:p>
@@ -610,7 +966,10 @@
           <a:bodyPr/>
           <a:lstStyle/>
           <a:p>
-            <a:endParaRPr lang="en-US"/>
+            <a:r>
+              <a:rPr lang="en-US"/>
+              <a:t>Dr. Naveen Kumar, Associate Professor, AIIT, AUP</a:t>
+            </a:r>
           </a:p>
         </p:txBody>
       </p:sp>
@@ -791,9 +1150,9 @@
           <a:bodyPr/>
           <a:lstStyle/>
           <a:p>
-            <a:fld id="{E38C4BA5-40C7-8F44-BE87-D1C93CB86745}" type="datetimeFigureOut">
-              <a:rPr lang="en-US" smtClean="0"/>
-              <a:t>8/8/24</a:t>
+            <a:fld id="{719EB990-4E4E-1943-8C1C-12853D706B9A}" type="datetime1">
+              <a:rPr lang="en-IN" smtClean="0"/>
+              <a:t>27/08/24</a:t>
             </a:fld>
             <a:endParaRPr lang="en-US"/>
           </a:p>
@@ -820,7 +1179,10 @@
           <a:bodyPr/>
           <a:lstStyle/>
           <a:p>
-            <a:endParaRPr lang="en-US"/>
+            <a:r>
+              <a:rPr lang="en-US"/>
+              <a:t>Dr. Naveen Kumar, Associate Professor, AIIT, AUP</a:t>
+            </a:r>
           </a:p>
         </p:txBody>
       </p:sp>
@@ -991,9 +1353,9 @@
           <a:bodyPr/>
           <a:lstStyle/>
           <a:p>
-            <a:fld id="{E38C4BA5-40C7-8F44-BE87-D1C93CB86745}" type="datetimeFigureOut">
-              <a:rPr lang="en-US" smtClean="0"/>
-              <a:t>8/8/24</a:t>
+            <a:fld id="{A9C9BBE1-741A-0648-9FB9-0BEE4EFF1769}" type="datetime1">
+              <a:rPr lang="en-IN" smtClean="0"/>
+              <a:t>27/08/24</a:t>
             </a:fld>
             <a:endParaRPr lang="en-US"/>
           </a:p>
@@ -1020,7 +1382,10 @@
           <a:bodyPr/>
           <a:lstStyle/>
           <a:p>
-            <a:endParaRPr lang="en-US"/>
+            <a:r>
+              <a:rPr lang="en-US"/>
+              <a:t>Dr. Naveen Kumar, Associate Professor, AIIT, AUP</a:t>
+            </a:r>
           </a:p>
         </p:txBody>
       </p:sp>
@@ -1267,9 +1632,9 @@
           <a:bodyPr/>
           <a:lstStyle/>
           <a:p>
-            <a:fld id="{E38C4BA5-40C7-8F44-BE87-D1C93CB86745}" type="datetimeFigureOut">
-              <a:rPr lang="en-US" smtClean="0"/>
-              <a:t>8/8/24</a:t>
+            <a:fld id="{35C882BB-C20A-8B4C-9887-D4BCC9D0F8C8}" type="datetime1">
+              <a:rPr lang="en-IN" smtClean="0"/>
+              <a:t>27/08/24</a:t>
             </a:fld>
             <a:endParaRPr lang="en-US"/>
           </a:p>
@@ -1296,7 +1661,10 @@
           <a:bodyPr/>
           <a:lstStyle/>
           <a:p>
-            <a:endParaRPr lang="en-US"/>
+            <a:r>
+              <a:rPr lang="en-US"/>
+              <a:t>Dr. Naveen Kumar, Associate Professor, AIIT, AUP</a:t>
+            </a:r>
           </a:p>
         </p:txBody>
       </p:sp>
@@ -1535,9 +1903,9 @@
           <a:bodyPr/>
           <a:lstStyle/>
           <a:p>
-            <a:fld id="{E38C4BA5-40C7-8F44-BE87-D1C93CB86745}" type="datetimeFigureOut">
-              <a:rPr lang="en-US" smtClean="0"/>
-              <a:t>8/8/24</a:t>
+            <a:fld id="{E284CB5A-2E2B-ED45-BF47-CC10A7AD9A44}" type="datetime1">
+              <a:rPr lang="en-IN" smtClean="0"/>
+              <a:t>27/08/24</a:t>
             </a:fld>
             <a:endParaRPr lang="en-US"/>
           </a:p>
@@ -1564,7 +1932,10 @@
           <a:bodyPr/>
           <a:lstStyle/>
           <a:p>
-            <a:endParaRPr lang="en-US"/>
+            <a:r>
+              <a:rPr lang="en-US"/>
+              <a:t>Dr. Naveen Kumar, Associate Professor, AIIT, AUP</a:t>
+            </a:r>
           </a:p>
         </p:txBody>
       </p:sp>
@@ -1950,9 +2321,9 @@
           <a:bodyPr/>
           <a:lstStyle/>
           <a:p>
-            <a:fld id="{E38C4BA5-40C7-8F44-BE87-D1C93CB86745}" type="datetimeFigureOut">
-              <a:rPr lang="en-US" smtClean="0"/>
-              <a:t>8/8/24</a:t>
+            <a:fld id="{B6E71B2D-8A7B-9441-8B6C-0636727EA3DB}" type="datetime1">
+              <a:rPr lang="en-IN" smtClean="0"/>
+              <a:t>27/08/24</a:t>
             </a:fld>
             <a:endParaRPr lang="en-US"/>
           </a:p>
@@ -1979,7 +2350,10 @@
           <a:bodyPr/>
           <a:lstStyle/>
           <a:p>
-            <a:endParaRPr lang="en-US"/>
+            <a:r>
+              <a:rPr lang="en-US"/>
+              <a:t>Dr. Naveen Kumar, Associate Professor, AIIT, AUP</a:t>
+            </a:r>
           </a:p>
         </p:txBody>
       </p:sp>
@@ -2092,9 +2466,9 @@
           <a:bodyPr/>
           <a:lstStyle/>
           <a:p>
-            <a:fld id="{E38C4BA5-40C7-8F44-BE87-D1C93CB86745}" type="datetimeFigureOut">
-              <a:rPr lang="en-US" smtClean="0"/>
-              <a:t>8/8/24</a:t>
+            <a:fld id="{408B73EA-DBC0-9447-B607-BFC80E85A525}" type="datetime1">
+              <a:rPr lang="en-IN" smtClean="0"/>
+              <a:t>27/08/24</a:t>
             </a:fld>
             <a:endParaRPr lang="en-US"/>
           </a:p>
@@ -2121,7 +2495,10 @@
           <a:bodyPr/>
           <a:lstStyle/>
           <a:p>
-            <a:endParaRPr lang="en-US"/>
+            <a:r>
+              <a:rPr lang="en-US"/>
+              <a:t>Dr. Naveen Kumar, Associate Professor, AIIT, AUP</a:t>
+            </a:r>
           </a:p>
         </p:txBody>
       </p:sp>
@@ -2205,9 +2582,9 @@
           <a:bodyPr/>
           <a:lstStyle/>
           <a:p>
-            <a:fld id="{E38C4BA5-40C7-8F44-BE87-D1C93CB86745}" type="datetimeFigureOut">
-              <a:rPr lang="en-US" smtClean="0"/>
-              <a:t>8/8/24</a:t>
+            <a:fld id="{DCE13C32-0C3C-184E-A086-A74383006F3F}" type="datetime1">
+              <a:rPr lang="en-IN" smtClean="0"/>
+              <a:t>27/08/24</a:t>
             </a:fld>
             <a:endParaRPr lang="en-US"/>
           </a:p>
@@ -2234,7 +2611,10 @@
           <a:bodyPr/>
           <a:lstStyle/>
           <a:p>
-            <a:endParaRPr lang="en-US"/>
+            <a:r>
+              <a:rPr lang="en-US"/>
+              <a:t>Dr. Naveen Kumar, Associate Professor, AIIT, AUP</a:t>
+            </a:r>
           </a:p>
         </p:txBody>
       </p:sp>
@@ -2518,9 +2898,9 @@
           <a:bodyPr/>
           <a:lstStyle/>
           <a:p>
-            <a:fld id="{E38C4BA5-40C7-8F44-BE87-D1C93CB86745}" type="datetimeFigureOut">
-              <a:rPr lang="en-US" smtClean="0"/>
-              <a:t>8/8/24</a:t>
+            <a:fld id="{924730C1-8B20-524C-8AFF-485032FD394E}" type="datetime1">
+              <a:rPr lang="en-IN" smtClean="0"/>
+              <a:t>27/08/24</a:t>
             </a:fld>
             <a:endParaRPr lang="en-US"/>
           </a:p>
@@ -2547,7 +2927,10 @@
           <a:bodyPr/>
           <a:lstStyle/>
           <a:p>
-            <a:endParaRPr lang="en-US"/>
+            <a:r>
+              <a:rPr lang="en-US"/>
+              <a:t>Dr. Naveen Kumar, Associate Professor, AIIT, AUP</a:t>
+            </a:r>
           </a:p>
         </p:txBody>
       </p:sp>
@@ -2807,9 +3190,9 @@
           <a:bodyPr/>
           <a:lstStyle/>
           <a:p>
-            <a:fld id="{E38C4BA5-40C7-8F44-BE87-D1C93CB86745}" type="datetimeFigureOut">
-              <a:rPr lang="en-US" smtClean="0"/>
-              <a:t>8/8/24</a:t>
+            <a:fld id="{F53FC729-226C-294E-BCE1-0820C5E0DC07}" type="datetime1">
+              <a:rPr lang="en-IN" smtClean="0"/>
+              <a:t>27/08/24</a:t>
             </a:fld>
             <a:endParaRPr lang="en-US"/>
           </a:p>
@@ -2836,7 +3219,10 @@
           <a:bodyPr/>
           <a:lstStyle/>
           <a:p>
-            <a:endParaRPr lang="en-US"/>
+            <a:r>
+              <a:rPr lang="en-US"/>
+              <a:t>Dr. Naveen Kumar, Associate Professor, AIIT, AUP</a:t>
+            </a:r>
           </a:p>
         </p:txBody>
       </p:sp>
@@ -3050,9 +3436,9 @@
             </a:lvl1pPr>
           </a:lstStyle>
           <a:p>
-            <a:fld id="{E38C4BA5-40C7-8F44-BE87-D1C93CB86745}" type="datetimeFigureOut">
-              <a:rPr lang="en-US" smtClean="0"/>
-              <a:t>8/8/24</a:t>
+            <a:fld id="{D5A31A57-7541-7842-8554-3333C1C2586C}" type="datetime1">
+              <a:rPr lang="en-IN" smtClean="0"/>
+              <a:t>27/08/24</a:t>
             </a:fld>
             <a:endParaRPr lang="en-US"/>
           </a:p>
@@ -3097,7 +3483,10 @@
             </a:lvl1pPr>
           </a:lstStyle>
           <a:p>
-            <a:endParaRPr lang="en-US"/>
+            <a:r>
+              <a:rPr lang="en-US"/>
+              <a:t>Dr. Naveen Kumar, Associate Professor, AIIT, AUP</a:t>
+            </a:r>
           </a:p>
         </p:txBody>
       </p:sp>
@@ -3169,6 +3558,7 @@
     <p:sldLayoutId id="2147483658" r:id="rId10"/>
     <p:sldLayoutId id="2147483659" r:id="rId11"/>
   </p:sldLayoutIdLst>
+  <p:hf sldNum="0" hdr="0" dt="0"/>
   <p:txStyles>
     <p:titleStyle>
       <a:lvl1pPr algn="l" defTabSz="914400" rtl="0" eaLnBrk="1" latinLnBrk="0" hangingPunct="1">
@@ -3545,6 +3935,34 @@
           </a:p>
         </p:txBody>
       </p:sp>
+      <p:sp>
+        <p:nvSpPr>
+          <p:cNvPr id="4" name="Footer Placeholder 3">
+            <a:extLst>
+              <a:ext uri="{FF2B5EF4-FFF2-40B4-BE49-F238E27FC236}">
+                <a16:creationId xmlns:a16="http://schemas.microsoft.com/office/drawing/2014/main" id="{B3287423-CA62-4F94-4701-6ABA7B55CD6F}"/>
+              </a:ext>
+            </a:extLst>
+          </p:cNvPr>
+          <p:cNvSpPr>
+            <a:spLocks noGrp="1"/>
+          </p:cNvSpPr>
+          <p:nvPr>
+            <p:ph type="ftr" sz="quarter" idx="11"/>
+          </p:nvPr>
+        </p:nvSpPr>
+        <p:spPr/>
+        <p:txBody>
+          <a:bodyPr/>
+          <a:lstStyle/>
+          <a:p>
+            <a:r>
+              <a:rPr lang="en-US"/>
+              <a:t>Dr. Naveen Kumar, Associate Professor, AIIT, AUP</a:t>
+            </a:r>
+          </a:p>
+        </p:txBody>
+      </p:sp>
     </p:spTree>
     <p:extLst>
       <p:ext uri="{BB962C8B-B14F-4D97-AF65-F5344CB8AC3E}">
@@ -3666,6 +4084,34 @@
           </a:p>
           <a:p>
             <a:endParaRPr lang="en-US" dirty="0"/>
+          </a:p>
+        </p:txBody>
+      </p:sp>
+      <p:sp>
+        <p:nvSpPr>
+          <p:cNvPr id="4" name="Footer Placeholder 3">
+            <a:extLst>
+              <a:ext uri="{FF2B5EF4-FFF2-40B4-BE49-F238E27FC236}">
+                <a16:creationId xmlns:a16="http://schemas.microsoft.com/office/drawing/2014/main" id="{3775186E-F824-B07B-0745-64111D841AAE}"/>
+              </a:ext>
+            </a:extLst>
+          </p:cNvPr>
+          <p:cNvSpPr>
+            <a:spLocks noGrp="1"/>
+          </p:cNvSpPr>
+          <p:nvPr>
+            <p:ph type="ftr" sz="quarter" idx="11"/>
+          </p:nvPr>
+        </p:nvSpPr>
+        <p:spPr/>
+        <p:txBody>
+          <a:bodyPr/>
+          <a:lstStyle/>
+          <a:p>
+            <a:r>
+              <a:rPr lang="en-US"/>
+              <a:t>Dr. Naveen Kumar, Associate Professor, AIIT, AUP</a:t>
+            </a:r>
           </a:p>
         </p:txBody>
       </p:sp>
@@ -3857,6 +4303,34 @@
           </a:extLst>
         </p:spPr>
       </p:pic>
+      <p:sp>
+        <p:nvSpPr>
+          <p:cNvPr id="4" name="Footer Placeholder 3">
+            <a:extLst>
+              <a:ext uri="{FF2B5EF4-FFF2-40B4-BE49-F238E27FC236}">
+                <a16:creationId xmlns:a16="http://schemas.microsoft.com/office/drawing/2014/main" id="{39917AEC-EB87-4FA7-3835-D469959F01E3}"/>
+              </a:ext>
+            </a:extLst>
+          </p:cNvPr>
+          <p:cNvSpPr>
+            <a:spLocks noGrp="1"/>
+          </p:cNvSpPr>
+          <p:nvPr>
+            <p:ph type="ftr" sz="quarter" idx="11"/>
+          </p:nvPr>
+        </p:nvSpPr>
+        <p:spPr/>
+        <p:txBody>
+          <a:bodyPr/>
+          <a:lstStyle/>
+          <a:p>
+            <a:r>
+              <a:rPr lang="en-US"/>
+              <a:t>Dr. Naveen Kumar, Associate Professor, AIIT, AUP</a:t>
+            </a:r>
+          </a:p>
+        </p:txBody>
+      </p:sp>
     </p:spTree>
     <p:extLst>
       <p:ext uri="{BB962C8B-B14F-4D97-AF65-F5344CB8AC3E}">
@@ -3984,6 +4458,34 @@
           </a:extLst>
         </p:spPr>
       </p:pic>
+      <p:sp>
+        <p:nvSpPr>
+          <p:cNvPr id="4" name="Footer Placeholder 3">
+            <a:extLst>
+              <a:ext uri="{FF2B5EF4-FFF2-40B4-BE49-F238E27FC236}">
+                <a16:creationId xmlns:a16="http://schemas.microsoft.com/office/drawing/2014/main" id="{011A5480-AAF1-77E3-AB65-67EA5BC53C44}"/>
+              </a:ext>
+            </a:extLst>
+          </p:cNvPr>
+          <p:cNvSpPr>
+            <a:spLocks noGrp="1"/>
+          </p:cNvSpPr>
+          <p:nvPr>
+            <p:ph type="ftr" sz="quarter" idx="11"/>
+          </p:nvPr>
+        </p:nvSpPr>
+        <p:spPr/>
+        <p:txBody>
+          <a:bodyPr/>
+          <a:lstStyle/>
+          <a:p>
+            <a:r>
+              <a:rPr lang="en-US"/>
+              <a:t>Dr. Naveen Kumar, Associate Professor, AIIT, AUP</a:t>
+            </a:r>
+          </a:p>
+        </p:txBody>
+      </p:sp>
     </p:spTree>
     <p:extLst>
       <p:ext uri="{BB962C8B-B14F-4D97-AF65-F5344CB8AC3E}">
@@ -4253,6 +4755,34 @@
           </a:extLst>
         </p:spPr>
       </p:pic>
+      <p:sp>
+        <p:nvSpPr>
+          <p:cNvPr id="4" name="Footer Placeholder 3">
+            <a:extLst>
+              <a:ext uri="{FF2B5EF4-FFF2-40B4-BE49-F238E27FC236}">
+                <a16:creationId xmlns:a16="http://schemas.microsoft.com/office/drawing/2014/main" id="{20D9874E-30E4-3196-4711-B5AF9E119EDA}"/>
+              </a:ext>
+            </a:extLst>
+          </p:cNvPr>
+          <p:cNvSpPr>
+            <a:spLocks noGrp="1"/>
+          </p:cNvSpPr>
+          <p:nvPr>
+            <p:ph type="ftr" sz="quarter" idx="11"/>
+          </p:nvPr>
+        </p:nvSpPr>
+        <p:spPr/>
+        <p:txBody>
+          <a:bodyPr/>
+          <a:lstStyle/>
+          <a:p>
+            <a:r>
+              <a:rPr lang="en-US"/>
+              <a:t>Dr. Naveen Kumar, Associate Professor, AIIT, AUP</a:t>
+            </a:r>
+          </a:p>
+        </p:txBody>
+      </p:sp>
     </p:spTree>
     <p:extLst>
       <p:ext uri="{BB962C8B-B14F-4D97-AF65-F5344CB8AC3E}">
@@ -4454,6 +4984,34 @@
           </a:extLst>
         </p:spPr>
       </p:pic>
+      <p:sp>
+        <p:nvSpPr>
+          <p:cNvPr id="4" name="Footer Placeholder 3">
+            <a:extLst>
+              <a:ext uri="{FF2B5EF4-FFF2-40B4-BE49-F238E27FC236}">
+                <a16:creationId xmlns:a16="http://schemas.microsoft.com/office/drawing/2014/main" id="{78626F20-903A-036D-DFF2-B3C4E0A55BF7}"/>
+              </a:ext>
+            </a:extLst>
+          </p:cNvPr>
+          <p:cNvSpPr>
+            <a:spLocks noGrp="1"/>
+          </p:cNvSpPr>
+          <p:nvPr>
+            <p:ph type="ftr" sz="quarter" idx="11"/>
+          </p:nvPr>
+        </p:nvSpPr>
+        <p:spPr/>
+        <p:txBody>
+          <a:bodyPr/>
+          <a:lstStyle/>
+          <a:p>
+            <a:r>
+              <a:rPr lang="en-US"/>
+              <a:t>Dr. Naveen Kumar, Associate Professor, AIIT, AUP</a:t>
+            </a:r>
+          </a:p>
+        </p:txBody>
+      </p:sp>
     </p:spTree>
     <p:extLst>
       <p:ext uri="{BB962C8B-B14F-4D97-AF65-F5344CB8AC3E}">
@@ -4711,6 +5269,34 @@
           </a:extLst>
         </p:spPr>
       </p:pic>
+      <p:sp>
+        <p:nvSpPr>
+          <p:cNvPr id="4" name="Footer Placeholder 3">
+            <a:extLst>
+              <a:ext uri="{FF2B5EF4-FFF2-40B4-BE49-F238E27FC236}">
+                <a16:creationId xmlns:a16="http://schemas.microsoft.com/office/drawing/2014/main" id="{8859BEA5-3BC4-4D71-8923-F634B672E25C}"/>
+              </a:ext>
+            </a:extLst>
+          </p:cNvPr>
+          <p:cNvSpPr>
+            <a:spLocks noGrp="1"/>
+          </p:cNvSpPr>
+          <p:nvPr>
+            <p:ph type="ftr" sz="quarter" idx="11"/>
+          </p:nvPr>
+        </p:nvSpPr>
+        <p:spPr/>
+        <p:txBody>
+          <a:bodyPr/>
+          <a:lstStyle/>
+          <a:p>
+            <a:r>
+              <a:rPr lang="en-US"/>
+              <a:t>Dr. Naveen Kumar, Associate Professor, AIIT, AUP</a:t>
+            </a:r>
+          </a:p>
+        </p:txBody>
+      </p:sp>
     </p:spTree>
     <p:extLst>
       <p:ext uri="{BB962C8B-B14F-4D97-AF65-F5344CB8AC3E}">
@@ -4883,6 +5469,34 @@
           </a:extLst>
         </p:spPr>
       </p:pic>
+      <p:sp>
+        <p:nvSpPr>
+          <p:cNvPr id="4" name="Footer Placeholder 3">
+            <a:extLst>
+              <a:ext uri="{FF2B5EF4-FFF2-40B4-BE49-F238E27FC236}">
+                <a16:creationId xmlns:a16="http://schemas.microsoft.com/office/drawing/2014/main" id="{6FF7D704-F425-E8F8-1198-C52F2822DBEA}"/>
+              </a:ext>
+            </a:extLst>
+          </p:cNvPr>
+          <p:cNvSpPr>
+            <a:spLocks noGrp="1"/>
+          </p:cNvSpPr>
+          <p:nvPr>
+            <p:ph type="ftr" sz="quarter" idx="11"/>
+          </p:nvPr>
+        </p:nvSpPr>
+        <p:spPr/>
+        <p:txBody>
+          <a:bodyPr/>
+          <a:lstStyle/>
+          <a:p>
+            <a:r>
+              <a:rPr lang="en-US"/>
+              <a:t>Dr. Naveen Kumar, Associate Professor, AIIT, AUP</a:t>
+            </a:r>
+          </a:p>
+        </p:txBody>
+      </p:sp>
     </p:spTree>
     <p:extLst>
       <p:ext uri="{BB962C8B-B14F-4D97-AF65-F5344CB8AC3E}">
@@ -5005,6 +5619,34 @@
           </a:p>
           <a:p>
             <a:endParaRPr lang="en-US" dirty="0"/>
+          </a:p>
+        </p:txBody>
+      </p:sp>
+      <p:sp>
+        <p:nvSpPr>
+          <p:cNvPr id="4" name="Footer Placeholder 3">
+            <a:extLst>
+              <a:ext uri="{FF2B5EF4-FFF2-40B4-BE49-F238E27FC236}">
+                <a16:creationId xmlns:a16="http://schemas.microsoft.com/office/drawing/2014/main" id="{7C03A4A6-B8E3-99AA-6756-864CBF96E47F}"/>
+              </a:ext>
+            </a:extLst>
+          </p:cNvPr>
+          <p:cNvSpPr>
+            <a:spLocks noGrp="1"/>
+          </p:cNvSpPr>
+          <p:nvPr>
+            <p:ph type="ftr" sz="quarter" idx="11"/>
+          </p:nvPr>
+        </p:nvSpPr>
+        <p:spPr/>
+        <p:txBody>
+          <a:bodyPr/>
+          <a:lstStyle/>
+          <a:p>
+            <a:r>
+              <a:rPr lang="en-US"/>
+              <a:t>Dr. Naveen Kumar, Associate Professor, AIIT, AUP</a:t>
+            </a:r>
           </a:p>
         </p:txBody>
       </p:sp>
@@ -5155,6 +5797,34 @@
           </a:extLst>
         </p:spPr>
       </p:pic>
+      <p:sp>
+        <p:nvSpPr>
+          <p:cNvPr id="4" name="Footer Placeholder 3">
+            <a:extLst>
+              <a:ext uri="{FF2B5EF4-FFF2-40B4-BE49-F238E27FC236}">
+                <a16:creationId xmlns:a16="http://schemas.microsoft.com/office/drawing/2014/main" id="{7842297D-B8D7-838A-D08A-7E8AD95A17F7}"/>
+              </a:ext>
+            </a:extLst>
+          </p:cNvPr>
+          <p:cNvSpPr>
+            <a:spLocks noGrp="1"/>
+          </p:cNvSpPr>
+          <p:nvPr>
+            <p:ph type="ftr" sz="quarter" idx="11"/>
+          </p:nvPr>
+        </p:nvSpPr>
+        <p:spPr/>
+        <p:txBody>
+          <a:bodyPr/>
+          <a:lstStyle/>
+          <a:p>
+            <a:r>
+              <a:rPr lang="en-US"/>
+              <a:t>Dr. Naveen Kumar, Associate Professor, AIIT, AUP</a:t>
+            </a:r>
+          </a:p>
+        </p:txBody>
+      </p:sp>
     </p:spTree>
     <p:extLst>
       <p:ext uri="{BB962C8B-B14F-4D97-AF65-F5344CB8AC3E}">
@@ -5247,6 +5917,34 @@
           <a:lstStyle/>
           <a:p>
             <a:endParaRPr lang="en-US"/>
+          </a:p>
+        </p:txBody>
+      </p:sp>
+      <p:sp>
+        <p:nvSpPr>
+          <p:cNvPr id="4" name="Footer Placeholder 3">
+            <a:extLst>
+              <a:ext uri="{FF2B5EF4-FFF2-40B4-BE49-F238E27FC236}">
+                <a16:creationId xmlns:a16="http://schemas.microsoft.com/office/drawing/2014/main" id="{DD2B1835-FEDC-9CD0-3BFE-382BC3161B9C}"/>
+              </a:ext>
+            </a:extLst>
+          </p:cNvPr>
+          <p:cNvSpPr>
+            <a:spLocks noGrp="1"/>
+          </p:cNvSpPr>
+          <p:nvPr>
+            <p:ph type="ftr" sz="quarter" idx="11"/>
+          </p:nvPr>
+        </p:nvSpPr>
+        <p:spPr/>
+        <p:txBody>
+          <a:bodyPr/>
+          <a:lstStyle/>
+          <a:p>
+            <a:r>
+              <a:rPr lang="en-US"/>
+              <a:t>Dr. Naveen Kumar, Associate Professor, AIIT, AUP</a:t>
+            </a:r>
           </a:p>
         </p:txBody>
       </p:sp>
@@ -5377,6 +6075,34 @@
           </a:extLst>
         </p:spPr>
       </p:pic>
+      <p:sp>
+        <p:nvSpPr>
+          <p:cNvPr id="4" name="Footer Placeholder 3">
+            <a:extLst>
+              <a:ext uri="{FF2B5EF4-FFF2-40B4-BE49-F238E27FC236}">
+                <a16:creationId xmlns:a16="http://schemas.microsoft.com/office/drawing/2014/main" id="{721B7049-272B-6CEF-B8B5-54376BED8456}"/>
+              </a:ext>
+            </a:extLst>
+          </p:cNvPr>
+          <p:cNvSpPr>
+            <a:spLocks noGrp="1"/>
+          </p:cNvSpPr>
+          <p:nvPr>
+            <p:ph type="ftr" sz="quarter" idx="11"/>
+          </p:nvPr>
+        </p:nvSpPr>
+        <p:spPr/>
+        <p:txBody>
+          <a:bodyPr/>
+          <a:lstStyle/>
+          <a:p>
+            <a:r>
+              <a:rPr lang="en-US"/>
+              <a:t>Dr. Naveen Kumar, Associate Professor, AIIT, AUP</a:t>
+            </a:r>
+          </a:p>
+        </p:txBody>
+      </p:sp>
     </p:spTree>
     <p:extLst>
       <p:ext uri="{BB962C8B-B14F-4D97-AF65-F5344CB8AC3E}">
@@ -5560,6 +6286,34 @@
           </a:extLst>
         </p:spPr>
       </p:pic>
+      <p:sp>
+        <p:nvSpPr>
+          <p:cNvPr id="4" name="Footer Placeholder 3">
+            <a:extLst>
+              <a:ext uri="{FF2B5EF4-FFF2-40B4-BE49-F238E27FC236}">
+                <a16:creationId xmlns:a16="http://schemas.microsoft.com/office/drawing/2014/main" id="{301940C6-1E12-1B8A-156B-170E8AAEB6CD}"/>
+              </a:ext>
+            </a:extLst>
+          </p:cNvPr>
+          <p:cNvSpPr>
+            <a:spLocks noGrp="1"/>
+          </p:cNvSpPr>
+          <p:nvPr>
+            <p:ph type="ftr" sz="quarter" idx="11"/>
+          </p:nvPr>
+        </p:nvSpPr>
+        <p:spPr/>
+        <p:txBody>
+          <a:bodyPr/>
+          <a:lstStyle/>
+          <a:p>
+            <a:r>
+              <a:rPr lang="en-US"/>
+              <a:t>Dr. Naveen Kumar, Associate Professor, AIIT, AUP</a:t>
+            </a:r>
+          </a:p>
+        </p:txBody>
+      </p:sp>
     </p:spTree>
     <p:extLst>
       <p:ext uri="{BB962C8B-B14F-4D97-AF65-F5344CB8AC3E}">
@@ -5826,6 +6580,34 @@
           </a:p>
         </p:txBody>
       </p:sp>
+      <p:sp>
+        <p:nvSpPr>
+          <p:cNvPr id="4" name="Footer Placeholder 3">
+            <a:extLst>
+              <a:ext uri="{FF2B5EF4-FFF2-40B4-BE49-F238E27FC236}">
+                <a16:creationId xmlns:a16="http://schemas.microsoft.com/office/drawing/2014/main" id="{87562ADA-A5F0-29AC-9E15-DFE55BC5B96E}"/>
+              </a:ext>
+            </a:extLst>
+          </p:cNvPr>
+          <p:cNvSpPr>
+            <a:spLocks noGrp="1"/>
+          </p:cNvSpPr>
+          <p:nvPr>
+            <p:ph type="ftr" sz="quarter" idx="11"/>
+          </p:nvPr>
+        </p:nvSpPr>
+        <p:spPr/>
+        <p:txBody>
+          <a:bodyPr/>
+          <a:lstStyle/>
+          <a:p>
+            <a:r>
+              <a:rPr lang="en-US"/>
+              <a:t>Dr. Naveen Kumar, Associate Professor, AIIT, AUP</a:t>
+            </a:r>
+          </a:p>
+        </p:txBody>
+      </p:sp>
     </p:spTree>
     <p:extLst>
       <p:ext uri="{BB962C8B-B14F-4D97-AF65-F5344CB8AC3E}">
@@ -5965,6 +6747,34 @@
               <a:t>3) Local variables</a:t>
             </a:r>
             <a:endParaRPr lang="en-US" dirty="0"/>
+          </a:p>
+        </p:txBody>
+      </p:sp>
+      <p:sp>
+        <p:nvSpPr>
+          <p:cNvPr id="4" name="Footer Placeholder 3">
+            <a:extLst>
+              <a:ext uri="{FF2B5EF4-FFF2-40B4-BE49-F238E27FC236}">
+                <a16:creationId xmlns:a16="http://schemas.microsoft.com/office/drawing/2014/main" id="{590DD4F1-AFCF-4473-9356-454A9DB387E0}"/>
+              </a:ext>
+            </a:extLst>
+          </p:cNvPr>
+          <p:cNvSpPr>
+            <a:spLocks noGrp="1"/>
+          </p:cNvSpPr>
+          <p:nvPr>
+            <p:ph type="ftr" sz="quarter" idx="11"/>
+          </p:nvPr>
+        </p:nvSpPr>
+        <p:spPr/>
+        <p:txBody>
+          <a:bodyPr/>
+          <a:lstStyle/>
+          <a:p>
+            <a:r>
+              <a:rPr lang="en-US"/>
+              <a:t>Dr. Naveen Kumar, Associate Professor, AIIT, AUP</a:t>
+            </a:r>
           </a:p>
         </p:txBody>
       </p:sp>
@@ -6158,6 +6968,34 @@
           </a:p>
         </p:txBody>
       </p:sp>
+      <p:sp>
+        <p:nvSpPr>
+          <p:cNvPr id="4" name="Footer Placeholder 3">
+            <a:extLst>
+              <a:ext uri="{FF2B5EF4-FFF2-40B4-BE49-F238E27FC236}">
+                <a16:creationId xmlns:a16="http://schemas.microsoft.com/office/drawing/2014/main" id="{00CDCE45-2BDD-AE14-0E9C-ECE09D92583C}"/>
+              </a:ext>
+            </a:extLst>
+          </p:cNvPr>
+          <p:cNvSpPr>
+            <a:spLocks noGrp="1"/>
+          </p:cNvSpPr>
+          <p:nvPr>
+            <p:ph type="ftr" sz="quarter" idx="11"/>
+          </p:nvPr>
+        </p:nvSpPr>
+        <p:spPr/>
+        <p:txBody>
+          <a:bodyPr/>
+          <a:lstStyle/>
+          <a:p>
+            <a:r>
+              <a:rPr lang="en-US"/>
+              <a:t>Dr. Naveen Kumar, Associate Professor, AIIT, AUP</a:t>
+            </a:r>
+          </a:p>
+        </p:txBody>
+      </p:sp>
     </p:spTree>
     <p:extLst>
       <p:ext uri="{BB962C8B-B14F-4D97-AF65-F5344CB8AC3E}">
@@ -6504,6 +7342,34 @@
               <a:t>provide default values.</a:t>
             </a:r>
             <a:endParaRPr lang="en-US" sz="2900" dirty="0"/>
+          </a:p>
+        </p:txBody>
+      </p:sp>
+      <p:sp>
+        <p:nvSpPr>
+          <p:cNvPr id="2" name="Footer Placeholder 1">
+            <a:extLst>
+              <a:ext uri="{FF2B5EF4-FFF2-40B4-BE49-F238E27FC236}">
+                <a16:creationId xmlns:a16="http://schemas.microsoft.com/office/drawing/2014/main" id="{0C738949-4F6B-EAF1-5337-A7ED6F8C9921}"/>
+              </a:ext>
+            </a:extLst>
+          </p:cNvPr>
+          <p:cNvSpPr>
+            <a:spLocks noGrp="1"/>
+          </p:cNvSpPr>
+          <p:nvPr>
+            <p:ph type="ftr" sz="quarter" idx="11"/>
+          </p:nvPr>
+        </p:nvSpPr>
+        <p:spPr/>
+        <p:txBody>
+          <a:bodyPr/>
+          <a:lstStyle/>
+          <a:p>
+            <a:r>
+              <a:rPr lang="en-US"/>
+              <a:t>Dr. Naveen Kumar, Associate Professor, AIIT, AUP</a:t>
+            </a:r>
           </a:p>
         </p:txBody>
       </p:sp>
@@ -6727,6 +7593,34 @@
           </a:p>
         </p:txBody>
       </p:sp>
+      <p:sp>
+        <p:nvSpPr>
+          <p:cNvPr id="4" name="Footer Placeholder 3">
+            <a:extLst>
+              <a:ext uri="{FF2B5EF4-FFF2-40B4-BE49-F238E27FC236}">
+                <a16:creationId xmlns:a16="http://schemas.microsoft.com/office/drawing/2014/main" id="{BD018E60-BF02-887B-5024-BC8F63842BCB}"/>
+              </a:ext>
+            </a:extLst>
+          </p:cNvPr>
+          <p:cNvSpPr>
+            <a:spLocks noGrp="1"/>
+          </p:cNvSpPr>
+          <p:nvPr>
+            <p:ph type="ftr" sz="quarter" idx="11"/>
+          </p:nvPr>
+        </p:nvSpPr>
+        <p:spPr/>
+        <p:txBody>
+          <a:bodyPr/>
+          <a:lstStyle/>
+          <a:p>
+            <a:r>
+              <a:rPr lang="en-US"/>
+              <a:t>Dr. Naveen Kumar, Associate Professor, AIIT, AUP</a:t>
+            </a:r>
+          </a:p>
+        </p:txBody>
+      </p:sp>
     </p:spTree>
     <p:extLst>
       <p:ext uri="{BB962C8B-B14F-4D97-AF65-F5344CB8AC3E}">
@@ -7038,6 +7932,34 @@
               <a:t>But within the same class it is not required to use class name we can access directly.</a:t>
             </a:r>
             <a:endParaRPr lang="en-US" dirty="0"/>
+          </a:p>
+        </p:txBody>
+      </p:sp>
+      <p:sp>
+        <p:nvSpPr>
+          <p:cNvPr id="4" name="Footer Placeholder 3">
+            <a:extLst>
+              <a:ext uri="{FF2B5EF4-FFF2-40B4-BE49-F238E27FC236}">
+                <a16:creationId xmlns:a16="http://schemas.microsoft.com/office/drawing/2014/main" id="{3C5320E7-92FB-FB0A-37FF-3B9B88D9A9AE}"/>
+              </a:ext>
+            </a:extLst>
+          </p:cNvPr>
+          <p:cNvSpPr>
+            <a:spLocks noGrp="1"/>
+          </p:cNvSpPr>
+          <p:nvPr>
+            <p:ph type="ftr" sz="quarter" idx="11"/>
+          </p:nvPr>
+        </p:nvSpPr>
+        <p:spPr/>
+        <p:txBody>
+          <a:bodyPr/>
+          <a:lstStyle/>
+          <a:p>
+            <a:r>
+              <a:rPr lang="en-US"/>
+              <a:t>Dr. Naveen Kumar, Associate Professor, AIIT, AUP</a:t>
+            </a:r>
           </a:p>
         </p:txBody>
       </p:sp>
@@ -7281,6 +8203,34 @@
           </a:p>
         </p:txBody>
       </p:sp>
+      <p:sp>
+        <p:nvSpPr>
+          <p:cNvPr id="4" name="Footer Placeholder 3">
+            <a:extLst>
+              <a:ext uri="{FF2B5EF4-FFF2-40B4-BE49-F238E27FC236}">
+                <a16:creationId xmlns:a16="http://schemas.microsoft.com/office/drawing/2014/main" id="{EEBFE9D2-C80D-E1A4-FB9A-869E5C2DA1EC}"/>
+              </a:ext>
+            </a:extLst>
+          </p:cNvPr>
+          <p:cNvSpPr>
+            <a:spLocks noGrp="1"/>
+          </p:cNvSpPr>
+          <p:nvPr>
+            <p:ph type="ftr" sz="quarter" idx="11"/>
+          </p:nvPr>
+        </p:nvSpPr>
+        <p:spPr/>
+        <p:txBody>
+          <a:bodyPr/>
+          <a:lstStyle/>
+          <a:p>
+            <a:r>
+              <a:rPr lang="en-US"/>
+              <a:t>Dr. Naveen Kumar, Associate Professor, AIIT, AUP</a:t>
+            </a:r>
+          </a:p>
+        </p:txBody>
+      </p:sp>
     </p:spTree>
     <p:extLst>
       <p:ext uri="{BB962C8B-B14F-4D97-AF65-F5344CB8AC3E}">
@@ -7528,6 +8478,34 @@
             <a:r>
               <a:rPr lang="en-US" dirty="0"/>
               <a:t>For the static variables it is not required to perform initialization explicitly, JVM will always provide default values.</a:t>
+            </a:r>
+          </a:p>
+        </p:txBody>
+      </p:sp>
+      <p:sp>
+        <p:nvSpPr>
+          <p:cNvPr id="4" name="Footer Placeholder 3">
+            <a:extLst>
+              <a:ext uri="{FF2B5EF4-FFF2-40B4-BE49-F238E27FC236}">
+                <a16:creationId xmlns:a16="http://schemas.microsoft.com/office/drawing/2014/main" id="{C1606983-A091-7E04-24D1-A0DA7FB0D4C6}"/>
+              </a:ext>
+            </a:extLst>
+          </p:cNvPr>
+          <p:cNvSpPr>
+            <a:spLocks noGrp="1"/>
+          </p:cNvSpPr>
+          <p:nvPr>
+            <p:ph type="ftr" sz="quarter" idx="11"/>
+          </p:nvPr>
+        </p:nvSpPr>
+        <p:spPr/>
+        <p:txBody>
+          <a:bodyPr/>
+          <a:lstStyle/>
+          <a:p>
+            <a:r>
+              <a:rPr lang="en-US"/>
+              <a:t>Dr. Naveen Kumar, Associate Professor, AIIT, AUP</a:t>
             </a:r>
           </a:p>
         </p:txBody>
@@ -8047,6 +9025,34 @@
           </a:p>
         </p:txBody>
       </p:sp>
+      <p:sp>
+        <p:nvSpPr>
+          <p:cNvPr id="2" name="Footer Placeholder 1">
+            <a:extLst>
+              <a:ext uri="{FF2B5EF4-FFF2-40B4-BE49-F238E27FC236}">
+                <a16:creationId xmlns:a16="http://schemas.microsoft.com/office/drawing/2014/main" id="{3B167398-ED71-5D43-E2B2-2DAA213AB485}"/>
+              </a:ext>
+            </a:extLst>
+          </p:cNvPr>
+          <p:cNvSpPr>
+            <a:spLocks noGrp="1"/>
+          </p:cNvSpPr>
+          <p:nvPr>
+            <p:ph type="ftr" sz="quarter" idx="11"/>
+          </p:nvPr>
+        </p:nvSpPr>
+        <p:spPr/>
+        <p:txBody>
+          <a:bodyPr/>
+          <a:lstStyle/>
+          <a:p>
+            <a:r>
+              <a:rPr lang="en-US"/>
+              <a:t>Dr. Naveen Kumar, Associate Professor, AIIT, AUP</a:t>
+            </a:r>
+          </a:p>
+        </p:txBody>
+      </p:sp>
     </p:spTree>
     <p:extLst>
       <p:ext uri="{BB962C8B-B14F-4D97-AF65-F5344CB8AC3E}">
@@ -8282,6 +9288,34 @@
           </a:p>
           <a:p>
             <a:endParaRPr lang="en-US" dirty="0"/>
+          </a:p>
+        </p:txBody>
+      </p:sp>
+      <p:sp>
+        <p:nvSpPr>
+          <p:cNvPr id="4" name="Footer Placeholder 3">
+            <a:extLst>
+              <a:ext uri="{FF2B5EF4-FFF2-40B4-BE49-F238E27FC236}">
+                <a16:creationId xmlns:a16="http://schemas.microsoft.com/office/drawing/2014/main" id="{7A63F305-1C60-F633-EFBD-E3CB6F785193}"/>
+              </a:ext>
+            </a:extLst>
+          </p:cNvPr>
+          <p:cNvSpPr>
+            <a:spLocks noGrp="1"/>
+          </p:cNvSpPr>
+          <p:nvPr>
+            <p:ph type="ftr" sz="quarter" idx="11"/>
+          </p:nvPr>
+        </p:nvSpPr>
+        <p:spPr/>
+        <p:txBody>
+          <a:bodyPr/>
+          <a:lstStyle/>
+          <a:p>
+            <a:r>
+              <a:rPr lang="en-US"/>
+              <a:t>Dr. Naveen Kumar, Associate Professor, AIIT, AUP</a:t>
+            </a:r>
           </a:p>
         </p:txBody>
       </p:sp>
@@ -8406,6 +9440,34 @@
           </a:p>
         </p:txBody>
       </p:sp>
+      <p:sp>
+        <p:nvSpPr>
+          <p:cNvPr id="4" name="Footer Placeholder 3">
+            <a:extLst>
+              <a:ext uri="{FF2B5EF4-FFF2-40B4-BE49-F238E27FC236}">
+                <a16:creationId xmlns:a16="http://schemas.microsoft.com/office/drawing/2014/main" id="{6E335378-1402-FE3F-5B64-B3F5981ECF46}"/>
+              </a:ext>
+            </a:extLst>
+          </p:cNvPr>
+          <p:cNvSpPr>
+            <a:spLocks noGrp="1"/>
+          </p:cNvSpPr>
+          <p:nvPr>
+            <p:ph type="ftr" sz="quarter" idx="11"/>
+          </p:nvPr>
+        </p:nvSpPr>
+        <p:spPr/>
+        <p:txBody>
+          <a:bodyPr/>
+          <a:lstStyle/>
+          <a:p>
+            <a:r>
+              <a:rPr lang="en-US"/>
+              <a:t>Dr. Naveen Kumar, Associate Professor, AIIT, AUP</a:t>
+            </a:r>
+          </a:p>
+        </p:txBody>
+      </p:sp>
     </p:spTree>
     <p:extLst>
       <p:ext uri="{BB962C8B-B14F-4D97-AF65-F5344CB8AC3E}">
@@ -8976,6 +10038,34 @@
               <a:rPr lang="en-IN" dirty="0"/>
             </a:br>
             <a:endParaRPr lang="en-US" dirty="0"/>
+          </a:p>
+        </p:txBody>
+      </p:sp>
+      <p:sp>
+        <p:nvSpPr>
+          <p:cNvPr id="2" name="Footer Placeholder 1">
+            <a:extLst>
+              <a:ext uri="{FF2B5EF4-FFF2-40B4-BE49-F238E27FC236}">
+                <a16:creationId xmlns:a16="http://schemas.microsoft.com/office/drawing/2014/main" id="{0B12BAD2-FF11-F3EB-A646-62C3068C0B4C}"/>
+              </a:ext>
+            </a:extLst>
+          </p:cNvPr>
+          <p:cNvSpPr>
+            <a:spLocks noGrp="1"/>
+          </p:cNvSpPr>
+          <p:nvPr>
+            <p:ph type="ftr" sz="quarter" idx="11"/>
+          </p:nvPr>
+        </p:nvSpPr>
+        <p:spPr/>
+        <p:txBody>
+          <a:bodyPr/>
+          <a:lstStyle/>
+          <a:p>
+            <a:r>
+              <a:rPr lang="en-US"/>
+              <a:t>Dr. Naveen Kumar, Associate Professor, AIIT, AUP</a:t>
+            </a:r>
           </a:p>
         </p:txBody>
       </p:sp>
@@ -9555,6 +10645,34 @@
           </a:p>
         </p:txBody>
       </p:sp>
+      <p:sp>
+        <p:nvSpPr>
+          <p:cNvPr id="2" name="Footer Placeholder 1">
+            <a:extLst>
+              <a:ext uri="{FF2B5EF4-FFF2-40B4-BE49-F238E27FC236}">
+                <a16:creationId xmlns:a16="http://schemas.microsoft.com/office/drawing/2014/main" id="{7EB46E50-F09E-11E8-011A-85A815D59E9D}"/>
+              </a:ext>
+            </a:extLst>
+          </p:cNvPr>
+          <p:cNvSpPr>
+            <a:spLocks noGrp="1"/>
+          </p:cNvSpPr>
+          <p:nvPr>
+            <p:ph type="ftr" sz="quarter" idx="11"/>
+          </p:nvPr>
+        </p:nvSpPr>
+        <p:spPr/>
+        <p:txBody>
+          <a:bodyPr/>
+          <a:lstStyle/>
+          <a:p>
+            <a:r>
+              <a:rPr lang="en-US"/>
+              <a:t>Dr. Naveen Kumar, Associate Professor, AIIT, AUP</a:t>
+            </a:r>
+          </a:p>
+        </p:txBody>
+      </p:sp>
     </p:spTree>
     <p:extLst>
       <p:ext uri="{BB962C8B-B14F-4D97-AF65-F5344CB8AC3E}">
@@ -9659,6 +10777,34 @@
               <a:t>Note: The only applicable modifier for local variables is final. If we are using any other modifier we will get compile time error</a:t>
             </a:r>
             <a:endParaRPr lang="en-US" dirty="0"/>
+          </a:p>
+        </p:txBody>
+      </p:sp>
+      <p:sp>
+        <p:nvSpPr>
+          <p:cNvPr id="2" name="Footer Placeholder 1">
+            <a:extLst>
+              <a:ext uri="{FF2B5EF4-FFF2-40B4-BE49-F238E27FC236}">
+                <a16:creationId xmlns:a16="http://schemas.microsoft.com/office/drawing/2014/main" id="{521DCFAA-BD8F-C1F3-3EC0-A3FA0C622216}"/>
+              </a:ext>
+            </a:extLst>
+          </p:cNvPr>
+          <p:cNvSpPr>
+            <a:spLocks noGrp="1"/>
+          </p:cNvSpPr>
+          <p:nvPr>
+            <p:ph type="ftr" sz="quarter" idx="11"/>
+          </p:nvPr>
+        </p:nvSpPr>
+        <p:spPr/>
+        <p:txBody>
+          <a:bodyPr/>
+          <a:lstStyle/>
+          <a:p>
+            <a:r>
+              <a:rPr lang="en-US"/>
+              <a:t>Dr. Naveen Kumar, Associate Professor, AIIT, AUP</a:t>
+            </a:r>
           </a:p>
         </p:txBody>
       </p:sp>
@@ -9850,6 +10996,34 @@
             <a:r>
               <a:rPr lang="en-US" dirty="0"/>
               <a:t>}</a:t>
+            </a:r>
+          </a:p>
+        </p:txBody>
+      </p:sp>
+      <p:sp>
+        <p:nvSpPr>
+          <p:cNvPr id="2" name="Footer Placeholder 1">
+            <a:extLst>
+              <a:ext uri="{FF2B5EF4-FFF2-40B4-BE49-F238E27FC236}">
+                <a16:creationId xmlns:a16="http://schemas.microsoft.com/office/drawing/2014/main" id="{DC85001F-E217-5A6E-DD62-778314EA3603}"/>
+              </a:ext>
+            </a:extLst>
+          </p:cNvPr>
+          <p:cNvSpPr>
+            <a:spLocks noGrp="1"/>
+          </p:cNvSpPr>
+          <p:nvPr>
+            <p:ph type="ftr" sz="quarter" idx="11"/>
+          </p:nvPr>
+        </p:nvSpPr>
+        <p:spPr/>
+        <p:txBody>
+          <a:bodyPr/>
+          <a:lstStyle/>
+          <a:p>
+            <a:r>
+              <a:rPr lang="en-US"/>
+              <a:t>Dr. Naveen Kumar, Associate Professor, AIIT, AUP</a:t>
             </a:r>
           </a:p>
         </p:txBody>
@@ -10238,6 +11412,34 @@
           <a:p>
             <a:pPr algn="ctr"/>
             <a:endParaRPr lang="en-US" dirty="0"/>
+          </a:p>
+        </p:txBody>
+      </p:sp>
+      <p:sp>
+        <p:nvSpPr>
+          <p:cNvPr id="9" name="Footer Placeholder 8">
+            <a:extLst>
+              <a:ext uri="{FF2B5EF4-FFF2-40B4-BE49-F238E27FC236}">
+                <a16:creationId xmlns:a16="http://schemas.microsoft.com/office/drawing/2014/main" id="{FF310801-08FC-5BEF-FD87-D1869033E720}"/>
+              </a:ext>
+            </a:extLst>
+          </p:cNvPr>
+          <p:cNvSpPr>
+            <a:spLocks noGrp="1"/>
+          </p:cNvSpPr>
+          <p:nvPr>
+            <p:ph type="ftr" sz="quarter" idx="11"/>
+          </p:nvPr>
+        </p:nvSpPr>
+        <p:spPr/>
+        <p:txBody>
+          <a:bodyPr/>
+          <a:lstStyle/>
+          <a:p>
+            <a:r>
+              <a:rPr lang="en-US"/>
+              <a:t>Dr. Naveen Kumar, Associate Professor, AIIT, AUP</a:t>
+            </a:r>
           </a:p>
         </p:txBody>
       </p:sp>
@@ -10647,6 +11849,34 @@
           </a:p>
         </p:txBody>
       </p:sp>
+      <p:sp>
+        <p:nvSpPr>
+          <p:cNvPr id="4" name="Footer Placeholder 3">
+            <a:extLst>
+              <a:ext uri="{FF2B5EF4-FFF2-40B4-BE49-F238E27FC236}">
+                <a16:creationId xmlns:a16="http://schemas.microsoft.com/office/drawing/2014/main" id="{559AF1E0-9109-60FF-E7C2-405999D1EFB4}"/>
+              </a:ext>
+            </a:extLst>
+          </p:cNvPr>
+          <p:cNvSpPr>
+            <a:spLocks noGrp="1"/>
+          </p:cNvSpPr>
+          <p:nvPr>
+            <p:ph type="ftr" sz="quarter" idx="11"/>
+          </p:nvPr>
+        </p:nvSpPr>
+        <p:spPr/>
+        <p:txBody>
+          <a:bodyPr/>
+          <a:lstStyle/>
+          <a:p>
+            <a:r>
+              <a:rPr lang="en-US"/>
+              <a:t>Dr. Naveen Kumar, Associate Professor, AIIT, AUP</a:t>
+            </a:r>
+          </a:p>
+        </p:txBody>
+      </p:sp>
     </p:spTree>
     <p:extLst>
       <p:ext uri="{BB962C8B-B14F-4D97-AF65-F5344CB8AC3E}">
@@ -10927,6 +12157,34 @@
           <a:p>
             <a:pPr algn="ctr"/>
             <a:endParaRPr lang="en-US" dirty="0"/>
+          </a:p>
+        </p:txBody>
+      </p:sp>
+      <p:sp>
+        <p:nvSpPr>
+          <p:cNvPr id="7" name="Footer Placeholder 6">
+            <a:extLst>
+              <a:ext uri="{FF2B5EF4-FFF2-40B4-BE49-F238E27FC236}">
+                <a16:creationId xmlns:a16="http://schemas.microsoft.com/office/drawing/2014/main" id="{C822B7E7-E6FC-E191-E195-FA9B3A29AA5B}"/>
+              </a:ext>
+            </a:extLst>
+          </p:cNvPr>
+          <p:cNvSpPr>
+            <a:spLocks noGrp="1"/>
+          </p:cNvSpPr>
+          <p:nvPr>
+            <p:ph type="ftr" sz="quarter" idx="11"/>
+          </p:nvPr>
+        </p:nvSpPr>
+        <p:spPr/>
+        <p:txBody>
+          <a:bodyPr/>
+          <a:lstStyle/>
+          <a:p>
+            <a:r>
+              <a:rPr lang="en-US"/>
+              <a:t>Dr. Naveen Kumar, Associate Professor, AIIT, AUP</a:t>
+            </a:r>
           </a:p>
         </p:txBody>
       </p:sp>
@@ -11213,6 +12471,34 @@
           </a:p>
         </p:txBody>
       </p:sp>
+      <p:sp>
+        <p:nvSpPr>
+          <p:cNvPr id="4" name="Footer Placeholder 3">
+            <a:extLst>
+              <a:ext uri="{FF2B5EF4-FFF2-40B4-BE49-F238E27FC236}">
+                <a16:creationId xmlns:a16="http://schemas.microsoft.com/office/drawing/2014/main" id="{45095E04-6B49-01FD-8A64-99825065BCB0}"/>
+              </a:ext>
+            </a:extLst>
+          </p:cNvPr>
+          <p:cNvSpPr>
+            <a:spLocks noGrp="1"/>
+          </p:cNvSpPr>
+          <p:nvPr>
+            <p:ph type="ftr" sz="quarter" idx="11"/>
+          </p:nvPr>
+        </p:nvSpPr>
+        <p:spPr/>
+        <p:txBody>
+          <a:bodyPr/>
+          <a:lstStyle/>
+          <a:p>
+            <a:r>
+              <a:rPr lang="en-US"/>
+              <a:t>Dr. Naveen Kumar, Associate Professor, AIIT, AUP</a:t>
+            </a:r>
+          </a:p>
+        </p:txBody>
+      </p:sp>
     </p:spTree>
     <p:extLst>
       <p:ext uri="{BB962C8B-B14F-4D97-AF65-F5344CB8AC3E}">
@@ -11346,6 +12632,34 @@
           </a:p>
           <a:p>
             <a:endParaRPr lang="en-US" dirty="0"/>
+          </a:p>
+        </p:txBody>
+      </p:sp>
+      <p:sp>
+        <p:nvSpPr>
+          <p:cNvPr id="4" name="Footer Placeholder 3">
+            <a:extLst>
+              <a:ext uri="{FF2B5EF4-FFF2-40B4-BE49-F238E27FC236}">
+                <a16:creationId xmlns:a16="http://schemas.microsoft.com/office/drawing/2014/main" id="{3F0E6596-24BA-CA4E-8928-947231AACAB8}"/>
+              </a:ext>
+            </a:extLst>
+          </p:cNvPr>
+          <p:cNvSpPr>
+            <a:spLocks noGrp="1"/>
+          </p:cNvSpPr>
+          <p:nvPr>
+            <p:ph type="ftr" sz="quarter" idx="11"/>
+          </p:nvPr>
+        </p:nvSpPr>
+        <p:spPr/>
+        <p:txBody>
+          <a:bodyPr/>
+          <a:lstStyle/>
+          <a:p>
+            <a:r>
+              <a:rPr lang="en-US"/>
+              <a:t>Dr. Naveen Kumar, Associate Professor, AIIT, AUP</a:t>
+            </a:r>
           </a:p>
         </p:txBody>
       </p:sp>
@@ -11429,6 +12743,34 @@
           </a:p>
         </p:txBody>
       </p:sp>
+      <p:sp>
+        <p:nvSpPr>
+          <p:cNvPr id="4" name="Footer Placeholder 3">
+            <a:extLst>
+              <a:ext uri="{FF2B5EF4-FFF2-40B4-BE49-F238E27FC236}">
+                <a16:creationId xmlns:a16="http://schemas.microsoft.com/office/drawing/2014/main" id="{90BBF261-577B-2BD1-7010-0AA1663BD766}"/>
+              </a:ext>
+            </a:extLst>
+          </p:cNvPr>
+          <p:cNvSpPr>
+            <a:spLocks noGrp="1"/>
+          </p:cNvSpPr>
+          <p:nvPr>
+            <p:ph type="ftr" sz="quarter" idx="11"/>
+          </p:nvPr>
+        </p:nvSpPr>
+        <p:spPr/>
+        <p:txBody>
+          <a:bodyPr/>
+          <a:lstStyle/>
+          <a:p>
+            <a:r>
+              <a:rPr lang="en-US"/>
+              <a:t>Dr. Naveen Kumar, Associate Professor, AIIT, AUP</a:t>
+            </a:r>
+          </a:p>
+        </p:txBody>
+      </p:sp>
     </p:spTree>
     <p:extLst>
       <p:ext uri="{BB962C8B-B14F-4D97-AF65-F5344CB8AC3E}">
@@ -11511,6 +12853,34 @@
             <a:r>
               <a:rPr lang="en-US" dirty="0"/>
               <a:t>Rules of Identifiers</a:t>
+            </a:r>
+          </a:p>
+        </p:txBody>
+      </p:sp>
+      <p:sp>
+        <p:nvSpPr>
+          <p:cNvPr id="4" name="Footer Placeholder 3">
+            <a:extLst>
+              <a:ext uri="{FF2B5EF4-FFF2-40B4-BE49-F238E27FC236}">
+                <a16:creationId xmlns:a16="http://schemas.microsoft.com/office/drawing/2014/main" id="{BF5DE32B-556D-5ECB-C4CF-CD64579F7FFB}"/>
+              </a:ext>
+            </a:extLst>
+          </p:cNvPr>
+          <p:cNvSpPr>
+            <a:spLocks noGrp="1"/>
+          </p:cNvSpPr>
+          <p:nvPr>
+            <p:ph type="ftr" sz="quarter" idx="11"/>
+          </p:nvPr>
+        </p:nvSpPr>
+        <p:spPr/>
+        <p:txBody>
+          <a:bodyPr/>
+          <a:lstStyle/>
+          <a:p>
+            <a:r>
+              <a:rPr lang="en-US"/>
+              <a:t>Dr. Naveen Kumar, Associate Professor, AIIT, AUP</a:t>
             </a:r>
           </a:p>
         </p:txBody>
@@ -11697,6 +13067,34 @@
           </a:p>
         </p:txBody>
       </p:sp>
+      <p:sp>
+        <p:nvSpPr>
+          <p:cNvPr id="4" name="Footer Placeholder 3">
+            <a:extLst>
+              <a:ext uri="{FF2B5EF4-FFF2-40B4-BE49-F238E27FC236}">
+                <a16:creationId xmlns:a16="http://schemas.microsoft.com/office/drawing/2014/main" id="{CC3582ED-4BE8-A0BD-E6AE-E516D25BF164}"/>
+              </a:ext>
+            </a:extLst>
+          </p:cNvPr>
+          <p:cNvSpPr>
+            <a:spLocks noGrp="1"/>
+          </p:cNvSpPr>
+          <p:nvPr>
+            <p:ph type="ftr" sz="quarter" idx="11"/>
+          </p:nvPr>
+        </p:nvSpPr>
+        <p:spPr/>
+        <p:txBody>
+          <a:bodyPr/>
+          <a:lstStyle/>
+          <a:p>
+            <a:r>
+              <a:rPr lang="en-US"/>
+              <a:t>Dr. Naveen Kumar, Associate Professor, AIIT, AUP</a:t>
+            </a:r>
+          </a:p>
+        </p:txBody>
+      </p:sp>
     </p:spTree>
     <p:extLst>
       <p:ext uri="{BB962C8B-B14F-4D97-AF65-F5344CB8AC3E}">
@@ -11833,6 +13231,34 @@
           </a:p>
           <a:p>
             <a:endParaRPr lang="en-US" dirty="0"/>
+          </a:p>
+        </p:txBody>
+      </p:sp>
+      <p:sp>
+        <p:nvSpPr>
+          <p:cNvPr id="4" name="Footer Placeholder 3">
+            <a:extLst>
+              <a:ext uri="{FF2B5EF4-FFF2-40B4-BE49-F238E27FC236}">
+                <a16:creationId xmlns:a16="http://schemas.microsoft.com/office/drawing/2014/main" id="{0F0AF476-44E3-9DA8-1765-773A03C517AA}"/>
+              </a:ext>
+            </a:extLst>
+          </p:cNvPr>
+          <p:cNvSpPr>
+            <a:spLocks noGrp="1"/>
+          </p:cNvSpPr>
+          <p:nvPr>
+            <p:ph type="ftr" sz="quarter" idx="11"/>
+          </p:nvPr>
+        </p:nvSpPr>
+        <p:spPr/>
+        <p:txBody>
+          <a:bodyPr/>
+          <a:lstStyle/>
+          <a:p>
+            <a:r>
+              <a:rPr lang="en-US"/>
+              <a:t>Dr. Naveen Kumar, Associate Professor, AIIT, AUP</a:t>
+            </a:r>
           </a:p>
         </p:txBody>
       </p:sp>
@@ -11979,6 +13405,34 @@
           </a:p>
         </p:txBody>
       </p:sp>
+      <p:sp>
+        <p:nvSpPr>
+          <p:cNvPr id="4" name="Footer Placeholder 3">
+            <a:extLst>
+              <a:ext uri="{FF2B5EF4-FFF2-40B4-BE49-F238E27FC236}">
+                <a16:creationId xmlns:a16="http://schemas.microsoft.com/office/drawing/2014/main" id="{CEE712DD-D84B-B3A6-F300-5827325B7161}"/>
+              </a:ext>
+            </a:extLst>
+          </p:cNvPr>
+          <p:cNvSpPr>
+            <a:spLocks noGrp="1"/>
+          </p:cNvSpPr>
+          <p:nvPr>
+            <p:ph type="ftr" sz="quarter" idx="11"/>
+          </p:nvPr>
+        </p:nvSpPr>
+        <p:spPr/>
+        <p:txBody>
+          <a:bodyPr/>
+          <a:lstStyle/>
+          <a:p>
+            <a:r>
+              <a:rPr lang="en-US"/>
+              <a:t>Dr. Naveen Kumar, Associate Professor, AIIT, AUP</a:t>
+            </a:r>
+          </a:p>
+        </p:txBody>
+      </p:sp>
     </p:spTree>
     <p:extLst>
       <p:ext uri="{BB962C8B-B14F-4D97-AF65-F5344CB8AC3E}">
@@ -12137,6 +13591,34 @@
           </a:p>
           <a:p>
             <a:endParaRPr lang="en-US" dirty="0"/>
+          </a:p>
+        </p:txBody>
+      </p:sp>
+      <p:sp>
+        <p:nvSpPr>
+          <p:cNvPr id="4" name="Footer Placeholder 3">
+            <a:extLst>
+              <a:ext uri="{FF2B5EF4-FFF2-40B4-BE49-F238E27FC236}">
+                <a16:creationId xmlns:a16="http://schemas.microsoft.com/office/drawing/2014/main" id="{5255D0F8-0AE6-E697-1667-B2CED0D0E54E}"/>
+              </a:ext>
+            </a:extLst>
+          </p:cNvPr>
+          <p:cNvSpPr>
+            <a:spLocks noGrp="1"/>
+          </p:cNvSpPr>
+          <p:nvPr>
+            <p:ph type="ftr" sz="quarter" idx="11"/>
+          </p:nvPr>
+        </p:nvSpPr>
+        <p:spPr/>
+        <p:txBody>
+          <a:bodyPr/>
+          <a:lstStyle/>
+          <a:p>
+            <a:r>
+              <a:rPr lang="en-US"/>
+              <a:t>Dr. Naveen Kumar, Associate Professor, AIIT, AUP</a:t>
+            </a:r>
           </a:p>
         </p:txBody>
       </p:sp>
@@ -12300,6 +13782,34 @@
           </a:p>
         </p:txBody>
       </p:sp>
+      <p:sp>
+        <p:nvSpPr>
+          <p:cNvPr id="4" name="Footer Placeholder 3">
+            <a:extLst>
+              <a:ext uri="{FF2B5EF4-FFF2-40B4-BE49-F238E27FC236}">
+                <a16:creationId xmlns:a16="http://schemas.microsoft.com/office/drawing/2014/main" id="{02AFEBF9-F216-453C-DAC5-ADE06AFAB60D}"/>
+              </a:ext>
+            </a:extLst>
+          </p:cNvPr>
+          <p:cNvSpPr>
+            <a:spLocks noGrp="1"/>
+          </p:cNvSpPr>
+          <p:nvPr>
+            <p:ph type="ftr" sz="quarter" idx="11"/>
+          </p:nvPr>
+        </p:nvSpPr>
+        <p:spPr/>
+        <p:txBody>
+          <a:bodyPr/>
+          <a:lstStyle/>
+          <a:p>
+            <a:r>
+              <a:rPr lang="en-US"/>
+              <a:t>Dr. Naveen Kumar, Associate Professor, AIIT, AUP</a:t>
+            </a:r>
+          </a:p>
+        </p:txBody>
+      </p:sp>
     </p:spTree>
     <p:extLst>
       <p:ext uri="{BB962C8B-B14F-4D97-AF65-F5344CB8AC3E}">
@@ -12380,6 +13890,34 @@
           <a:lstStyle/>
           <a:p>
             <a:endParaRPr lang="en-US" dirty="0"/>
+          </a:p>
+        </p:txBody>
+      </p:sp>
+      <p:sp>
+        <p:nvSpPr>
+          <p:cNvPr id="4" name="Footer Placeholder 3">
+            <a:extLst>
+              <a:ext uri="{FF2B5EF4-FFF2-40B4-BE49-F238E27FC236}">
+                <a16:creationId xmlns:a16="http://schemas.microsoft.com/office/drawing/2014/main" id="{2606C948-76D8-FD1A-A49B-4239B3325928}"/>
+              </a:ext>
+            </a:extLst>
+          </p:cNvPr>
+          <p:cNvSpPr>
+            <a:spLocks noGrp="1"/>
+          </p:cNvSpPr>
+          <p:nvPr>
+            <p:ph type="ftr" sz="quarter" idx="11"/>
+          </p:nvPr>
+        </p:nvSpPr>
+        <p:spPr/>
+        <p:txBody>
+          <a:bodyPr/>
+          <a:lstStyle/>
+          <a:p>
+            <a:r>
+              <a:rPr lang="en-US"/>
+              <a:t>Dr. Naveen Kumar, Associate Professor, AIIT, AUP</a:t>
+            </a:r>
           </a:p>
         </p:txBody>
       </p:sp>
@@ -12531,6 +14069,34 @@
             <a:r>
               <a:rPr lang="en-US" dirty="0"/>
               <a:t>To unregister a listener</a:t>
+            </a:r>
+          </a:p>
+        </p:txBody>
+      </p:sp>
+      <p:sp>
+        <p:nvSpPr>
+          <p:cNvPr id="4" name="Footer Placeholder 3">
+            <a:extLst>
+              <a:ext uri="{FF2B5EF4-FFF2-40B4-BE49-F238E27FC236}">
+                <a16:creationId xmlns:a16="http://schemas.microsoft.com/office/drawing/2014/main" id="{9BDFAE5E-3E95-1803-8FA8-2F7A062BC1B1}"/>
+              </a:ext>
+            </a:extLst>
+          </p:cNvPr>
+          <p:cNvSpPr>
+            <a:spLocks noGrp="1"/>
+          </p:cNvSpPr>
+          <p:nvPr>
+            <p:ph type="ftr" sz="quarter" idx="11"/>
+          </p:nvPr>
+        </p:nvSpPr>
+        <p:spPr/>
+        <p:txBody>
+          <a:bodyPr/>
+          <a:lstStyle/>
+          <a:p>
+            <a:r>
+              <a:rPr lang="en-US"/>
+              <a:t>Dr. Naveen Kumar, Associate Professor, AIIT, AUP</a:t>
             </a:r>
           </a:p>
         </p:txBody>
@@ -12919,6 +14485,34 @@
           <a:p>
             <a:pPr algn="ctr"/>
             <a:endParaRPr lang="en-US" dirty="0"/>
+          </a:p>
+        </p:txBody>
+      </p:sp>
+      <p:sp>
+        <p:nvSpPr>
+          <p:cNvPr id="9" name="Footer Placeholder 8">
+            <a:extLst>
+              <a:ext uri="{FF2B5EF4-FFF2-40B4-BE49-F238E27FC236}">
+                <a16:creationId xmlns:a16="http://schemas.microsoft.com/office/drawing/2014/main" id="{D178D3E1-6F9A-2DA1-CD87-4F02A6E6F54E}"/>
+              </a:ext>
+            </a:extLst>
+          </p:cNvPr>
+          <p:cNvSpPr>
+            <a:spLocks noGrp="1"/>
+          </p:cNvSpPr>
+          <p:nvPr>
+            <p:ph type="ftr" sz="quarter" idx="11"/>
+          </p:nvPr>
+        </p:nvSpPr>
+        <p:spPr/>
+        <p:txBody>
+          <a:bodyPr/>
+          <a:lstStyle/>
+          <a:p>
+            <a:r>
+              <a:rPr lang="en-US"/>
+              <a:t>Dr. Naveen Kumar, Associate Professor, AIIT, AUP</a:t>
+            </a:r>
           </a:p>
         </p:txBody>
       </p:sp>
@@ -13325,6 +14919,34 @@
           </a:extLst>
         </p:spPr>
       </p:pic>
+      <p:sp>
+        <p:nvSpPr>
+          <p:cNvPr id="4" name="Footer Placeholder 3">
+            <a:extLst>
+              <a:ext uri="{FF2B5EF4-FFF2-40B4-BE49-F238E27FC236}">
+                <a16:creationId xmlns:a16="http://schemas.microsoft.com/office/drawing/2014/main" id="{C3C92898-EE34-08AB-3CB4-72D848528635}"/>
+              </a:ext>
+            </a:extLst>
+          </p:cNvPr>
+          <p:cNvSpPr>
+            <a:spLocks noGrp="1"/>
+          </p:cNvSpPr>
+          <p:nvPr>
+            <p:ph type="ftr" sz="quarter" idx="11"/>
+          </p:nvPr>
+        </p:nvSpPr>
+        <p:spPr/>
+        <p:txBody>
+          <a:bodyPr/>
+          <a:lstStyle/>
+          <a:p>
+            <a:r>
+              <a:rPr lang="en-US"/>
+              <a:t>Dr. Naveen Kumar, Associate Professor, AIIT, AUP</a:t>
+            </a:r>
+          </a:p>
+        </p:txBody>
+      </p:sp>
     </p:spTree>
     <p:extLst>
       <p:ext uri="{BB962C8B-B14F-4D97-AF65-F5344CB8AC3E}">
@@ -13643,6 +15265,34 @@
           </a:extLst>
         </p:spPr>
       </p:pic>
+      <p:sp>
+        <p:nvSpPr>
+          <p:cNvPr id="4" name="Footer Placeholder 3">
+            <a:extLst>
+              <a:ext uri="{FF2B5EF4-FFF2-40B4-BE49-F238E27FC236}">
+                <a16:creationId xmlns:a16="http://schemas.microsoft.com/office/drawing/2014/main" id="{24FCA37B-8516-B172-A603-CFD3C71633FB}"/>
+              </a:ext>
+            </a:extLst>
+          </p:cNvPr>
+          <p:cNvSpPr>
+            <a:spLocks noGrp="1"/>
+          </p:cNvSpPr>
+          <p:nvPr>
+            <p:ph type="ftr" sz="quarter" idx="11"/>
+          </p:nvPr>
+        </p:nvSpPr>
+        <p:spPr/>
+        <p:txBody>
+          <a:bodyPr/>
+          <a:lstStyle/>
+          <a:p>
+            <a:r>
+              <a:rPr lang="en-US"/>
+              <a:t>Dr. Naveen Kumar, Associate Professor, AIIT, AUP</a:t>
+            </a:r>
+          </a:p>
+        </p:txBody>
+      </p:sp>
     </p:spTree>
     <p:extLst>
       <p:ext uri="{BB962C8B-B14F-4D97-AF65-F5344CB8AC3E}">
@@ -13886,6 +15536,34 @@
           </a:extLst>
         </p:spPr>
       </p:pic>
+      <p:sp>
+        <p:nvSpPr>
+          <p:cNvPr id="4" name="Footer Placeholder 3">
+            <a:extLst>
+              <a:ext uri="{FF2B5EF4-FFF2-40B4-BE49-F238E27FC236}">
+                <a16:creationId xmlns:a16="http://schemas.microsoft.com/office/drawing/2014/main" id="{82143B7F-39EC-A6A2-1C55-33D60AD5F4C6}"/>
+              </a:ext>
+            </a:extLst>
+          </p:cNvPr>
+          <p:cNvSpPr>
+            <a:spLocks noGrp="1"/>
+          </p:cNvSpPr>
+          <p:nvPr>
+            <p:ph type="ftr" sz="quarter" idx="11"/>
+          </p:nvPr>
+        </p:nvSpPr>
+        <p:spPr/>
+        <p:txBody>
+          <a:bodyPr/>
+          <a:lstStyle/>
+          <a:p>
+            <a:r>
+              <a:rPr lang="en-US"/>
+              <a:t>Dr. Naveen Kumar, Associate Professor, AIIT, AUP</a:t>
+            </a:r>
+          </a:p>
+        </p:txBody>
+      </p:sp>
     </p:spTree>
     <p:extLst>
       <p:ext uri="{BB962C8B-B14F-4D97-AF65-F5344CB8AC3E}">
@@ -14557,6 +16235,34 @@
           </a:graphicData>
         </a:graphic>
       </p:graphicFrame>
+      <p:sp>
+        <p:nvSpPr>
+          <p:cNvPr id="3" name="Footer Placeholder 2">
+            <a:extLst>
+              <a:ext uri="{FF2B5EF4-FFF2-40B4-BE49-F238E27FC236}">
+                <a16:creationId xmlns:a16="http://schemas.microsoft.com/office/drawing/2014/main" id="{68364671-2D6D-8ABA-D5B6-D25D499E5BBF}"/>
+              </a:ext>
+            </a:extLst>
+          </p:cNvPr>
+          <p:cNvSpPr>
+            <a:spLocks noGrp="1"/>
+          </p:cNvSpPr>
+          <p:nvPr>
+            <p:ph type="ftr" sz="quarter" idx="11"/>
+          </p:nvPr>
+        </p:nvSpPr>
+        <p:spPr/>
+        <p:txBody>
+          <a:bodyPr/>
+          <a:lstStyle/>
+          <a:p>
+            <a:r>
+              <a:rPr lang="en-US"/>
+              <a:t>Dr. Naveen Kumar, Associate Professor, AIIT, AUP</a:t>
+            </a:r>
+          </a:p>
+        </p:txBody>
+      </p:sp>
     </p:spTree>
     <p:extLst>
       <p:ext uri="{BB962C8B-B14F-4D97-AF65-F5344CB8AC3E}">
@@ -14684,6 +16390,34 @@
           </a:extLst>
         </p:spPr>
       </p:pic>
+      <p:sp>
+        <p:nvSpPr>
+          <p:cNvPr id="4" name="Footer Placeholder 3">
+            <a:extLst>
+              <a:ext uri="{FF2B5EF4-FFF2-40B4-BE49-F238E27FC236}">
+                <a16:creationId xmlns:a16="http://schemas.microsoft.com/office/drawing/2014/main" id="{4817A4CE-8685-8DFC-1583-E05FD675B5AD}"/>
+              </a:ext>
+            </a:extLst>
+          </p:cNvPr>
+          <p:cNvSpPr>
+            <a:spLocks noGrp="1"/>
+          </p:cNvSpPr>
+          <p:nvPr>
+            <p:ph type="ftr" sz="quarter" idx="11"/>
+          </p:nvPr>
+        </p:nvSpPr>
+        <p:spPr/>
+        <p:txBody>
+          <a:bodyPr/>
+          <a:lstStyle/>
+          <a:p>
+            <a:r>
+              <a:rPr lang="en-US"/>
+              <a:t>Dr. Naveen Kumar, Associate Professor, AIIT, AUP</a:t>
+            </a:r>
+          </a:p>
+        </p:txBody>
+      </p:sp>
     </p:spTree>
     <p:extLst>
       <p:ext uri="{BB962C8B-B14F-4D97-AF65-F5344CB8AC3E}">
@@ -14886,6 +16620,34 @@
           </a:extLst>
         </p:spPr>
       </p:pic>
+      <p:sp>
+        <p:nvSpPr>
+          <p:cNvPr id="4" name="Footer Placeholder 3">
+            <a:extLst>
+              <a:ext uri="{FF2B5EF4-FFF2-40B4-BE49-F238E27FC236}">
+                <a16:creationId xmlns:a16="http://schemas.microsoft.com/office/drawing/2014/main" id="{43FBBE80-8901-8A3D-4E1F-F8EC47C9A0C5}"/>
+              </a:ext>
+            </a:extLst>
+          </p:cNvPr>
+          <p:cNvSpPr>
+            <a:spLocks noGrp="1"/>
+          </p:cNvSpPr>
+          <p:nvPr>
+            <p:ph type="ftr" sz="quarter" idx="11"/>
+          </p:nvPr>
+        </p:nvSpPr>
+        <p:spPr/>
+        <p:txBody>
+          <a:bodyPr/>
+          <a:lstStyle/>
+          <a:p>
+            <a:r>
+              <a:rPr lang="en-US"/>
+              <a:t>Dr. Naveen Kumar, Associate Professor, AIIT, AUP</a:t>
+            </a:r>
+          </a:p>
+        </p:txBody>
+      </p:sp>
     </p:spTree>
     <p:extLst>
       <p:ext uri="{BB962C8B-B14F-4D97-AF65-F5344CB8AC3E}">
@@ -15375,6 +17137,34 @@
           <a:p>
             <a:pPr algn="ctr"/>
             <a:endParaRPr lang="en-US" dirty="0"/>
+          </a:p>
+        </p:txBody>
+      </p:sp>
+      <p:sp>
+        <p:nvSpPr>
+          <p:cNvPr id="3" name="Footer Placeholder 2">
+            <a:extLst>
+              <a:ext uri="{FF2B5EF4-FFF2-40B4-BE49-F238E27FC236}">
+                <a16:creationId xmlns:a16="http://schemas.microsoft.com/office/drawing/2014/main" id="{D1B04E8F-BC6B-8D7D-4C27-C35FD5DA3456}"/>
+              </a:ext>
+            </a:extLst>
+          </p:cNvPr>
+          <p:cNvSpPr>
+            <a:spLocks noGrp="1"/>
+          </p:cNvSpPr>
+          <p:nvPr>
+            <p:ph type="ftr" sz="quarter" idx="11"/>
+          </p:nvPr>
+        </p:nvSpPr>
+        <p:spPr/>
+        <p:txBody>
+          <a:bodyPr/>
+          <a:lstStyle/>
+          <a:p>
+            <a:r>
+              <a:rPr lang="en-US"/>
+              <a:t>Dr. Naveen Kumar, Associate Professor, AIIT, AUP</a:t>
+            </a:r>
           </a:p>
         </p:txBody>
       </p:sp>
@@ -16073,6 +17863,34 @@
           </a:p>
         </p:txBody>
       </p:sp>
+      <p:sp>
+        <p:nvSpPr>
+          <p:cNvPr id="9" name="Footer Placeholder 8">
+            <a:extLst>
+              <a:ext uri="{FF2B5EF4-FFF2-40B4-BE49-F238E27FC236}">
+                <a16:creationId xmlns:a16="http://schemas.microsoft.com/office/drawing/2014/main" id="{4B66EC4F-F8D1-C5F7-EF18-7186607DDCBA}"/>
+              </a:ext>
+            </a:extLst>
+          </p:cNvPr>
+          <p:cNvSpPr>
+            <a:spLocks noGrp="1"/>
+          </p:cNvSpPr>
+          <p:nvPr>
+            <p:ph type="ftr" sz="quarter" idx="11"/>
+          </p:nvPr>
+        </p:nvSpPr>
+        <p:spPr/>
+        <p:txBody>
+          <a:bodyPr/>
+          <a:lstStyle/>
+          <a:p>
+            <a:r>
+              <a:rPr lang="en-US"/>
+              <a:t>Dr. Naveen Kumar, Associate Professor, AIIT, AUP</a:t>
+            </a:r>
+          </a:p>
+        </p:txBody>
+      </p:sp>
     </p:spTree>
     <p:extLst>
       <p:ext uri="{BB962C8B-B14F-4D97-AF65-F5344CB8AC3E}">
@@ -16462,6 +18280,34 @@
           </a:extLst>
         </p:spPr>
       </p:pic>
+      <p:sp>
+        <p:nvSpPr>
+          <p:cNvPr id="4" name="Footer Placeholder 3">
+            <a:extLst>
+              <a:ext uri="{FF2B5EF4-FFF2-40B4-BE49-F238E27FC236}">
+                <a16:creationId xmlns:a16="http://schemas.microsoft.com/office/drawing/2014/main" id="{F0A12013-2D2A-50A3-3725-7AE45826F8C4}"/>
+              </a:ext>
+            </a:extLst>
+          </p:cNvPr>
+          <p:cNvSpPr>
+            <a:spLocks noGrp="1"/>
+          </p:cNvSpPr>
+          <p:nvPr>
+            <p:ph type="ftr" sz="quarter" idx="11"/>
+          </p:nvPr>
+        </p:nvSpPr>
+        <p:spPr/>
+        <p:txBody>
+          <a:bodyPr/>
+          <a:lstStyle/>
+          <a:p>
+            <a:r>
+              <a:rPr lang="en-US"/>
+              <a:t>Dr. Naveen Kumar, Associate Professor, AIIT, AUP</a:t>
+            </a:r>
+          </a:p>
+        </p:txBody>
+      </p:sp>
     </p:spTree>
     <p:extLst>
       <p:ext uri="{BB962C8B-B14F-4D97-AF65-F5344CB8AC3E}">
@@ -16664,6 +18510,34 @@
           </a:extLst>
         </p:spPr>
       </p:pic>
+      <p:sp>
+        <p:nvSpPr>
+          <p:cNvPr id="4" name="Footer Placeholder 3">
+            <a:extLst>
+              <a:ext uri="{FF2B5EF4-FFF2-40B4-BE49-F238E27FC236}">
+                <a16:creationId xmlns:a16="http://schemas.microsoft.com/office/drawing/2014/main" id="{6750CA4A-8004-2880-7583-356B45BB3958}"/>
+              </a:ext>
+            </a:extLst>
+          </p:cNvPr>
+          <p:cNvSpPr>
+            <a:spLocks noGrp="1"/>
+          </p:cNvSpPr>
+          <p:nvPr>
+            <p:ph type="ftr" sz="quarter" idx="11"/>
+          </p:nvPr>
+        </p:nvSpPr>
+        <p:spPr/>
+        <p:txBody>
+          <a:bodyPr/>
+          <a:lstStyle/>
+          <a:p>
+            <a:r>
+              <a:rPr lang="en-US"/>
+              <a:t>Dr. Naveen Kumar, Associate Professor, AIIT, AUP</a:t>
+            </a:r>
+          </a:p>
+        </p:txBody>
+      </p:sp>
     </p:spTree>
     <p:extLst>
       <p:ext uri="{BB962C8B-B14F-4D97-AF65-F5344CB8AC3E}">
@@ -17175,6 +19049,34 @@
           <a:p>
             <a:pPr algn="ctr"/>
             <a:endParaRPr lang="en-US" dirty="0"/>
+          </a:p>
+        </p:txBody>
+      </p:sp>
+      <p:sp>
+        <p:nvSpPr>
+          <p:cNvPr id="10" name="Footer Placeholder 9">
+            <a:extLst>
+              <a:ext uri="{FF2B5EF4-FFF2-40B4-BE49-F238E27FC236}">
+                <a16:creationId xmlns:a16="http://schemas.microsoft.com/office/drawing/2014/main" id="{A3AAFE6B-AB74-00DB-C8BE-6894FB70A811}"/>
+              </a:ext>
+            </a:extLst>
+          </p:cNvPr>
+          <p:cNvSpPr>
+            <a:spLocks noGrp="1"/>
+          </p:cNvSpPr>
+          <p:nvPr>
+            <p:ph type="ftr" sz="quarter" idx="11"/>
+          </p:nvPr>
+        </p:nvSpPr>
+        <p:spPr/>
+        <p:txBody>
+          <a:bodyPr/>
+          <a:lstStyle/>
+          <a:p>
+            <a:r>
+              <a:rPr lang="en-US"/>
+              <a:t>Dr. Naveen Kumar, Associate Professor, AIIT, AUP</a:t>
+            </a:r>
           </a:p>
         </p:txBody>
       </p:sp>
@@ -17627,6 +19529,34 @@
           </a:extLst>
         </p:spPr>
       </p:pic>
+      <p:sp>
+        <p:nvSpPr>
+          <p:cNvPr id="4" name="Footer Placeholder 3">
+            <a:extLst>
+              <a:ext uri="{FF2B5EF4-FFF2-40B4-BE49-F238E27FC236}">
+                <a16:creationId xmlns:a16="http://schemas.microsoft.com/office/drawing/2014/main" id="{35C0B91C-9CD1-55B1-2FEF-C3D0F97B8A99}"/>
+              </a:ext>
+            </a:extLst>
+          </p:cNvPr>
+          <p:cNvSpPr>
+            <a:spLocks noGrp="1"/>
+          </p:cNvSpPr>
+          <p:nvPr>
+            <p:ph type="ftr" sz="quarter" idx="11"/>
+          </p:nvPr>
+        </p:nvSpPr>
+        <p:spPr/>
+        <p:txBody>
+          <a:bodyPr/>
+          <a:lstStyle/>
+          <a:p>
+            <a:r>
+              <a:rPr lang="en-US"/>
+              <a:t>Dr. Naveen Kumar, Associate Professor, AIIT, AUP</a:t>
+            </a:r>
+          </a:p>
+        </p:txBody>
+      </p:sp>
     </p:spTree>
     <p:extLst>
       <p:ext uri="{BB962C8B-B14F-4D97-AF65-F5344CB8AC3E}">
@@ -17878,6 +19808,34 @@
           <a:p>
             <a:pPr algn="ctr"/>
             <a:endParaRPr lang="en-US" dirty="0"/>
+          </a:p>
+        </p:txBody>
+      </p:sp>
+      <p:sp>
+        <p:nvSpPr>
+          <p:cNvPr id="5" name="Footer Placeholder 4">
+            <a:extLst>
+              <a:ext uri="{FF2B5EF4-FFF2-40B4-BE49-F238E27FC236}">
+                <a16:creationId xmlns:a16="http://schemas.microsoft.com/office/drawing/2014/main" id="{79449CC4-B81B-980A-D985-BC5A5EDA5E99}"/>
+              </a:ext>
+            </a:extLst>
+          </p:cNvPr>
+          <p:cNvSpPr>
+            <a:spLocks noGrp="1"/>
+          </p:cNvSpPr>
+          <p:nvPr>
+            <p:ph type="ftr" sz="quarter" idx="11"/>
+          </p:nvPr>
+        </p:nvSpPr>
+        <p:spPr/>
+        <p:txBody>
+          <a:bodyPr/>
+          <a:lstStyle/>
+          <a:p>
+            <a:r>
+              <a:rPr lang="en-US"/>
+              <a:t>Dr. Naveen Kumar, Associate Professor, AIIT, AUP</a:t>
+            </a:r>
           </a:p>
         </p:txBody>
       </p:sp>
@@ -18131,6 +20089,34 @@
           </a:extLst>
         </p:spPr>
       </p:pic>
+      <p:sp>
+        <p:nvSpPr>
+          <p:cNvPr id="4" name="Footer Placeholder 3">
+            <a:extLst>
+              <a:ext uri="{FF2B5EF4-FFF2-40B4-BE49-F238E27FC236}">
+                <a16:creationId xmlns:a16="http://schemas.microsoft.com/office/drawing/2014/main" id="{82591AF2-0F61-69B5-749D-801D0105D3B3}"/>
+              </a:ext>
+            </a:extLst>
+          </p:cNvPr>
+          <p:cNvSpPr>
+            <a:spLocks noGrp="1"/>
+          </p:cNvSpPr>
+          <p:nvPr>
+            <p:ph type="ftr" sz="quarter" idx="11"/>
+          </p:nvPr>
+        </p:nvSpPr>
+        <p:spPr/>
+        <p:txBody>
+          <a:bodyPr/>
+          <a:lstStyle/>
+          <a:p>
+            <a:r>
+              <a:rPr lang="en-US"/>
+              <a:t>Dr. Naveen Kumar, Associate Professor, AIIT, AUP</a:t>
+            </a:r>
+          </a:p>
+        </p:txBody>
+      </p:sp>
     </p:spTree>
     <p:extLst>
       <p:ext uri="{BB962C8B-B14F-4D97-AF65-F5344CB8AC3E}">
@@ -18487,6 +20473,34 @@
           </a:graphicData>
         </a:graphic>
       </p:graphicFrame>
+      <p:sp>
+        <p:nvSpPr>
+          <p:cNvPr id="3" name="Footer Placeholder 2">
+            <a:extLst>
+              <a:ext uri="{FF2B5EF4-FFF2-40B4-BE49-F238E27FC236}">
+                <a16:creationId xmlns:a16="http://schemas.microsoft.com/office/drawing/2014/main" id="{282DCDD7-F98A-126F-BAA6-6A4C1B2C749E}"/>
+              </a:ext>
+            </a:extLst>
+          </p:cNvPr>
+          <p:cNvSpPr>
+            <a:spLocks noGrp="1"/>
+          </p:cNvSpPr>
+          <p:nvPr>
+            <p:ph type="ftr" sz="quarter" idx="11"/>
+          </p:nvPr>
+        </p:nvSpPr>
+        <p:spPr/>
+        <p:txBody>
+          <a:bodyPr/>
+          <a:lstStyle/>
+          <a:p>
+            <a:r>
+              <a:rPr lang="en-US"/>
+              <a:t>Dr. Naveen Kumar, Associate Professor, AIIT, AUP</a:t>
+            </a:r>
+          </a:p>
+        </p:txBody>
+      </p:sp>
     </p:spTree>
     <p:extLst>
       <p:ext uri="{BB962C8B-B14F-4D97-AF65-F5344CB8AC3E}">
@@ -18614,6 +20628,34 @@
           </a:extLst>
         </p:spPr>
       </p:pic>
+      <p:sp>
+        <p:nvSpPr>
+          <p:cNvPr id="4" name="Footer Placeholder 3">
+            <a:extLst>
+              <a:ext uri="{FF2B5EF4-FFF2-40B4-BE49-F238E27FC236}">
+                <a16:creationId xmlns:a16="http://schemas.microsoft.com/office/drawing/2014/main" id="{9E1C53B5-028E-A83E-09BE-C2F4D446DB05}"/>
+              </a:ext>
+            </a:extLst>
+          </p:cNvPr>
+          <p:cNvSpPr>
+            <a:spLocks noGrp="1"/>
+          </p:cNvSpPr>
+          <p:nvPr>
+            <p:ph type="ftr" sz="quarter" idx="11"/>
+          </p:nvPr>
+        </p:nvSpPr>
+        <p:spPr/>
+        <p:txBody>
+          <a:bodyPr/>
+          <a:lstStyle/>
+          <a:p>
+            <a:r>
+              <a:rPr lang="en-US"/>
+              <a:t>Dr. Naveen Kumar, Associate Professor, AIIT, AUP</a:t>
+            </a:r>
+          </a:p>
+        </p:txBody>
+      </p:sp>
     </p:spTree>
     <p:extLst>
       <p:ext uri="{BB962C8B-B14F-4D97-AF65-F5344CB8AC3E}">
@@ -18790,6 +20832,34 @@
           <a:p>
             <a:pPr algn="ctr"/>
             <a:endParaRPr lang="en-US" dirty="0"/>
+          </a:p>
+        </p:txBody>
+      </p:sp>
+      <p:sp>
+        <p:nvSpPr>
+          <p:cNvPr id="5" name="Footer Placeholder 4">
+            <a:extLst>
+              <a:ext uri="{FF2B5EF4-FFF2-40B4-BE49-F238E27FC236}">
+                <a16:creationId xmlns:a16="http://schemas.microsoft.com/office/drawing/2014/main" id="{5094964B-DC7A-5AE9-5BFB-4432E81A19DB}"/>
+              </a:ext>
+            </a:extLst>
+          </p:cNvPr>
+          <p:cNvSpPr>
+            <a:spLocks noGrp="1"/>
+          </p:cNvSpPr>
+          <p:nvPr>
+            <p:ph type="ftr" sz="quarter" idx="11"/>
+          </p:nvPr>
+        </p:nvSpPr>
+        <p:spPr/>
+        <p:txBody>
+          <a:bodyPr/>
+          <a:lstStyle/>
+          <a:p>
+            <a:r>
+              <a:rPr lang="en-US"/>
+              <a:t>Dr. Naveen Kumar, Associate Professor, AIIT, AUP</a:t>
+            </a:r>
           </a:p>
         </p:txBody>
       </p:sp>
@@ -19043,6 +21113,34 @@
           </a:extLst>
         </p:spPr>
       </p:pic>
+      <p:sp>
+        <p:nvSpPr>
+          <p:cNvPr id="4" name="Footer Placeholder 3">
+            <a:extLst>
+              <a:ext uri="{FF2B5EF4-FFF2-40B4-BE49-F238E27FC236}">
+                <a16:creationId xmlns:a16="http://schemas.microsoft.com/office/drawing/2014/main" id="{6B4ACDCE-EF35-6E30-5B9F-4B8995466AB8}"/>
+              </a:ext>
+            </a:extLst>
+          </p:cNvPr>
+          <p:cNvSpPr>
+            <a:spLocks noGrp="1"/>
+          </p:cNvSpPr>
+          <p:nvPr>
+            <p:ph type="ftr" sz="quarter" idx="11"/>
+          </p:nvPr>
+        </p:nvSpPr>
+        <p:spPr/>
+        <p:txBody>
+          <a:bodyPr/>
+          <a:lstStyle/>
+          <a:p>
+            <a:r>
+              <a:rPr lang="en-US"/>
+              <a:t>Dr. Naveen Kumar, Associate Professor, AIIT, AUP</a:t>
+            </a:r>
+          </a:p>
+        </p:txBody>
+      </p:sp>
     </p:spTree>
     <p:extLst>
       <p:ext uri="{BB962C8B-B14F-4D97-AF65-F5344CB8AC3E}">
@@ -19245,6 +21343,34 @@
           </a:extLst>
         </p:spPr>
       </p:pic>
+      <p:sp>
+        <p:nvSpPr>
+          <p:cNvPr id="4" name="Footer Placeholder 3">
+            <a:extLst>
+              <a:ext uri="{FF2B5EF4-FFF2-40B4-BE49-F238E27FC236}">
+                <a16:creationId xmlns:a16="http://schemas.microsoft.com/office/drawing/2014/main" id="{FA76C3D7-93FB-910F-4018-8D4488DC433C}"/>
+              </a:ext>
+            </a:extLst>
+          </p:cNvPr>
+          <p:cNvSpPr>
+            <a:spLocks noGrp="1"/>
+          </p:cNvSpPr>
+          <p:nvPr>
+            <p:ph type="ftr" sz="quarter" idx="11"/>
+          </p:nvPr>
+        </p:nvSpPr>
+        <p:spPr/>
+        <p:txBody>
+          <a:bodyPr/>
+          <a:lstStyle/>
+          <a:p>
+            <a:r>
+              <a:rPr lang="en-US"/>
+              <a:t>Dr. Naveen Kumar, Associate Professor, AIIT, AUP</a:t>
+            </a:r>
+          </a:p>
+        </p:txBody>
+      </p:sp>
     </p:spTree>
     <p:extLst>
       <p:ext uri="{BB962C8B-B14F-4D97-AF65-F5344CB8AC3E}">
@@ -19447,6 +21573,34 @@
           </a:extLst>
         </p:spPr>
       </p:pic>
+      <p:sp>
+        <p:nvSpPr>
+          <p:cNvPr id="4" name="Footer Placeholder 3">
+            <a:extLst>
+              <a:ext uri="{FF2B5EF4-FFF2-40B4-BE49-F238E27FC236}">
+                <a16:creationId xmlns:a16="http://schemas.microsoft.com/office/drawing/2014/main" id="{CD1DC890-72AE-CFF1-CD9D-7215313DC55E}"/>
+              </a:ext>
+            </a:extLst>
+          </p:cNvPr>
+          <p:cNvSpPr>
+            <a:spLocks noGrp="1"/>
+          </p:cNvSpPr>
+          <p:nvPr>
+            <p:ph type="ftr" sz="quarter" idx="11"/>
+          </p:nvPr>
+        </p:nvSpPr>
+        <p:spPr/>
+        <p:txBody>
+          <a:bodyPr/>
+          <a:lstStyle/>
+          <a:p>
+            <a:r>
+              <a:rPr lang="en-US"/>
+              <a:t>Dr. Naveen Kumar, Associate Professor, AIIT, AUP</a:t>
+            </a:r>
+          </a:p>
+        </p:txBody>
+      </p:sp>
     </p:spTree>
     <p:extLst>
       <p:ext uri="{BB962C8B-B14F-4D97-AF65-F5344CB8AC3E}">
@@ -19649,6 +21803,34 @@
           </a:extLst>
         </p:spPr>
       </p:pic>
+      <p:sp>
+        <p:nvSpPr>
+          <p:cNvPr id="4" name="Footer Placeholder 3">
+            <a:extLst>
+              <a:ext uri="{FF2B5EF4-FFF2-40B4-BE49-F238E27FC236}">
+                <a16:creationId xmlns:a16="http://schemas.microsoft.com/office/drawing/2014/main" id="{5BD7C523-48F1-A89F-96CA-F89E29EADBEA}"/>
+              </a:ext>
+            </a:extLst>
+          </p:cNvPr>
+          <p:cNvSpPr>
+            <a:spLocks noGrp="1"/>
+          </p:cNvSpPr>
+          <p:nvPr>
+            <p:ph type="ftr" sz="quarter" idx="11"/>
+          </p:nvPr>
+        </p:nvSpPr>
+        <p:spPr/>
+        <p:txBody>
+          <a:bodyPr/>
+          <a:lstStyle/>
+          <a:p>
+            <a:r>
+              <a:rPr lang="en-US"/>
+              <a:t>Dr. Naveen Kumar, Associate Professor, AIIT, AUP</a:t>
+            </a:r>
+          </a:p>
+        </p:txBody>
+      </p:sp>
     </p:spTree>
     <p:extLst>
       <p:ext uri="{BB962C8B-B14F-4D97-AF65-F5344CB8AC3E}">
@@ -19952,6 +22134,34 @@
           <a:p>
             <a:pPr algn="ctr"/>
             <a:endParaRPr lang="en-US" dirty="0"/>
+          </a:p>
+        </p:txBody>
+      </p:sp>
+      <p:sp>
+        <p:nvSpPr>
+          <p:cNvPr id="6" name="Footer Placeholder 5">
+            <a:extLst>
+              <a:ext uri="{FF2B5EF4-FFF2-40B4-BE49-F238E27FC236}">
+                <a16:creationId xmlns:a16="http://schemas.microsoft.com/office/drawing/2014/main" id="{EEA15AC4-9844-CEE8-9B5D-9531D691CACC}"/>
+              </a:ext>
+            </a:extLst>
+          </p:cNvPr>
+          <p:cNvSpPr>
+            <a:spLocks noGrp="1"/>
+          </p:cNvSpPr>
+          <p:nvPr>
+            <p:ph type="ftr" sz="quarter" idx="11"/>
+          </p:nvPr>
+        </p:nvSpPr>
+        <p:spPr/>
+        <p:txBody>
+          <a:bodyPr/>
+          <a:lstStyle/>
+          <a:p>
+            <a:r>
+              <a:rPr lang="en-US"/>
+              <a:t>Dr. Naveen Kumar, Associate Professor, AIIT, AUP</a:t>
+            </a:r>
           </a:p>
         </p:txBody>
       </p:sp>
@@ -20251,6 +22461,34 @@
           </a:extLst>
         </p:spPr>
       </p:pic>
+      <p:sp>
+        <p:nvSpPr>
+          <p:cNvPr id="4" name="Footer Placeholder 3">
+            <a:extLst>
+              <a:ext uri="{FF2B5EF4-FFF2-40B4-BE49-F238E27FC236}">
+                <a16:creationId xmlns:a16="http://schemas.microsoft.com/office/drawing/2014/main" id="{7208B40A-9233-4B2D-565A-61A59B2A78E4}"/>
+              </a:ext>
+            </a:extLst>
+          </p:cNvPr>
+          <p:cNvSpPr>
+            <a:spLocks noGrp="1"/>
+          </p:cNvSpPr>
+          <p:nvPr>
+            <p:ph type="ftr" sz="quarter" idx="11"/>
+          </p:nvPr>
+        </p:nvSpPr>
+        <p:spPr/>
+        <p:txBody>
+          <a:bodyPr/>
+          <a:lstStyle/>
+          <a:p>
+            <a:r>
+              <a:rPr lang="en-US"/>
+              <a:t>Dr. Naveen Kumar, Associate Professor, AIIT, AUP</a:t>
+            </a:r>
+          </a:p>
+        </p:txBody>
+      </p:sp>
     </p:spTree>
     <p:extLst>
       <p:ext uri="{BB962C8B-B14F-4D97-AF65-F5344CB8AC3E}">
@@ -20531,6 +22769,34 @@
               <a:t>$</a:t>
             </a:r>
             <a:endParaRPr lang="en-US" dirty="0"/>
+          </a:p>
+        </p:txBody>
+      </p:sp>
+      <p:sp>
+        <p:nvSpPr>
+          <p:cNvPr id="4" name="Footer Placeholder 3">
+            <a:extLst>
+              <a:ext uri="{FF2B5EF4-FFF2-40B4-BE49-F238E27FC236}">
+                <a16:creationId xmlns:a16="http://schemas.microsoft.com/office/drawing/2014/main" id="{01196117-EF18-710A-FDDC-608B7852EFD0}"/>
+              </a:ext>
+            </a:extLst>
+          </p:cNvPr>
+          <p:cNvSpPr>
+            <a:spLocks noGrp="1"/>
+          </p:cNvSpPr>
+          <p:nvPr>
+            <p:ph type="ftr" sz="quarter" idx="11"/>
+          </p:nvPr>
+        </p:nvSpPr>
+        <p:spPr/>
+        <p:txBody>
+          <a:bodyPr/>
+          <a:lstStyle/>
+          <a:p>
+            <a:r>
+              <a:rPr lang="en-US"/>
+              <a:t>Dr. Naveen Kumar, Associate Professor, AIIT, AUP</a:t>
+            </a:r>
           </a:p>
         </p:txBody>
       </p:sp>
@@ -21273,6 +23539,34 @@
                 <a:srgbClr val="FF0000"/>
               </a:solidFill>
             </a:endParaRPr>
+          </a:p>
+        </p:txBody>
+      </p:sp>
+      <p:sp>
+        <p:nvSpPr>
+          <p:cNvPr id="4" name="Footer Placeholder 3">
+            <a:extLst>
+              <a:ext uri="{FF2B5EF4-FFF2-40B4-BE49-F238E27FC236}">
+                <a16:creationId xmlns:a16="http://schemas.microsoft.com/office/drawing/2014/main" id="{5A8B7F84-1F60-DE49-A7D6-84859DAC3DB6}"/>
+              </a:ext>
+            </a:extLst>
+          </p:cNvPr>
+          <p:cNvSpPr>
+            <a:spLocks noGrp="1"/>
+          </p:cNvSpPr>
+          <p:nvPr>
+            <p:ph type="ftr" sz="quarter" idx="11"/>
+          </p:nvPr>
+        </p:nvSpPr>
+        <p:spPr/>
+        <p:txBody>
+          <a:bodyPr/>
+          <a:lstStyle/>
+          <a:p>
+            <a:r>
+              <a:rPr lang="en-US"/>
+              <a:t>Dr. Naveen Kumar, Associate Professor, AIIT, AUP</a:t>
+            </a:r>
           </a:p>
         </p:txBody>
       </p:sp>
@@ -22021,6 +24315,34 @@
           </a:p>
         </p:txBody>
       </p:sp>
+      <p:sp>
+        <p:nvSpPr>
+          <p:cNvPr id="4" name="Footer Placeholder 3">
+            <a:extLst>
+              <a:ext uri="{FF2B5EF4-FFF2-40B4-BE49-F238E27FC236}">
+                <a16:creationId xmlns:a16="http://schemas.microsoft.com/office/drawing/2014/main" id="{7056BD2A-CABC-2279-2CDE-448110E640A3}"/>
+              </a:ext>
+            </a:extLst>
+          </p:cNvPr>
+          <p:cNvSpPr>
+            <a:spLocks noGrp="1"/>
+          </p:cNvSpPr>
+          <p:nvPr>
+            <p:ph type="ftr" sz="quarter" idx="11"/>
+          </p:nvPr>
+        </p:nvSpPr>
+        <p:spPr/>
+        <p:txBody>
+          <a:bodyPr/>
+          <a:lstStyle/>
+          <a:p>
+            <a:r>
+              <a:rPr lang="en-US"/>
+              <a:t>Dr. Naveen Kumar, Associate Professor, AIIT, AUP</a:t>
+            </a:r>
+          </a:p>
+        </p:txBody>
+      </p:sp>
     </p:spTree>
     <p:extLst>
       <p:ext uri="{BB962C8B-B14F-4D97-AF65-F5344CB8AC3E}">
@@ -22502,6 +24824,34 @@
           <a:p>
             <a:pPr algn="ctr"/>
             <a:endParaRPr lang="en-US" dirty="0"/>
+          </a:p>
+        </p:txBody>
+      </p:sp>
+      <p:sp>
+        <p:nvSpPr>
+          <p:cNvPr id="2" name="Footer Placeholder 1">
+            <a:extLst>
+              <a:ext uri="{FF2B5EF4-FFF2-40B4-BE49-F238E27FC236}">
+                <a16:creationId xmlns:a16="http://schemas.microsoft.com/office/drawing/2014/main" id="{9CA3A4FA-4746-E42F-9D9E-3605438F5EAE}"/>
+              </a:ext>
+            </a:extLst>
+          </p:cNvPr>
+          <p:cNvSpPr>
+            <a:spLocks noGrp="1"/>
+          </p:cNvSpPr>
+          <p:nvPr>
+            <p:ph type="ftr" sz="quarter" idx="11"/>
+          </p:nvPr>
+        </p:nvSpPr>
+        <p:spPr/>
+        <p:txBody>
+          <a:bodyPr/>
+          <a:lstStyle/>
+          <a:p>
+            <a:r>
+              <a:rPr lang="en-US"/>
+              <a:t>Dr. Naveen Kumar, Associate Professor, AIIT, AUP</a:t>
+            </a:r>
           </a:p>
         </p:txBody>
       </p:sp>
@@ -23507,6 +25857,34 @@
           </a:p>
         </p:txBody>
       </p:sp>
+      <p:sp>
+        <p:nvSpPr>
+          <p:cNvPr id="4" name="Footer Placeholder 3">
+            <a:extLst>
+              <a:ext uri="{FF2B5EF4-FFF2-40B4-BE49-F238E27FC236}">
+                <a16:creationId xmlns:a16="http://schemas.microsoft.com/office/drawing/2014/main" id="{B3BD361C-3204-4677-1D79-135DBE46331C}"/>
+              </a:ext>
+            </a:extLst>
+          </p:cNvPr>
+          <p:cNvSpPr>
+            <a:spLocks noGrp="1"/>
+          </p:cNvSpPr>
+          <p:nvPr>
+            <p:ph type="ftr" sz="quarter" idx="11"/>
+          </p:nvPr>
+        </p:nvSpPr>
+        <p:spPr/>
+        <p:txBody>
+          <a:bodyPr/>
+          <a:lstStyle/>
+          <a:p>
+            <a:r>
+              <a:rPr lang="en-US"/>
+              <a:t>Dr. Naveen Kumar, Associate Professor, AIIT, AUP</a:t>
+            </a:r>
+          </a:p>
+        </p:txBody>
+      </p:sp>
     </p:spTree>
     <p:extLst>
       <p:ext uri="{BB962C8B-B14F-4D97-AF65-F5344CB8AC3E}">
@@ -25338,6 +27716,34 @@
               <a:t>4) this</a:t>
             </a:r>
             <a:endParaRPr lang="en-US" sz="1100" dirty="0"/>
+          </a:p>
+        </p:txBody>
+      </p:sp>
+      <p:sp>
+        <p:nvSpPr>
+          <p:cNvPr id="2" name="Footer Placeholder 1">
+            <a:extLst>
+              <a:ext uri="{FF2B5EF4-FFF2-40B4-BE49-F238E27FC236}">
+                <a16:creationId xmlns:a16="http://schemas.microsoft.com/office/drawing/2014/main" id="{DEE76F22-DDFE-12F4-4E77-99B88DDC009C}"/>
+              </a:ext>
+            </a:extLst>
+          </p:cNvPr>
+          <p:cNvSpPr>
+            <a:spLocks noGrp="1"/>
+          </p:cNvSpPr>
+          <p:nvPr>
+            <p:ph type="ftr" sz="quarter" idx="11"/>
+          </p:nvPr>
+        </p:nvSpPr>
+        <p:spPr/>
+        <p:txBody>
+          <a:bodyPr/>
+          <a:lstStyle/>
+          <a:p>
+            <a:r>
+              <a:rPr lang="en-US"/>
+              <a:t>Dr. Naveen Kumar, Associate Professor, AIIT, AUP</a:t>
+            </a:r>
           </a:p>
         </p:txBody>
       </p:sp>
@@ -26339,6 +28745,34 @@
           </a:p>
         </p:txBody>
       </p:sp>
+      <p:sp>
+        <p:nvSpPr>
+          <p:cNvPr id="2" name="Footer Placeholder 1">
+            <a:extLst>
+              <a:ext uri="{FF2B5EF4-FFF2-40B4-BE49-F238E27FC236}">
+                <a16:creationId xmlns:a16="http://schemas.microsoft.com/office/drawing/2014/main" id="{5E383E84-A8C5-7571-FAE4-9DBB190A23AA}"/>
+              </a:ext>
+            </a:extLst>
+          </p:cNvPr>
+          <p:cNvSpPr>
+            <a:spLocks noGrp="1"/>
+          </p:cNvSpPr>
+          <p:nvPr>
+            <p:ph type="ftr" sz="quarter" idx="11"/>
+          </p:nvPr>
+        </p:nvSpPr>
+        <p:spPr/>
+        <p:txBody>
+          <a:bodyPr/>
+          <a:lstStyle/>
+          <a:p>
+            <a:r>
+              <a:rPr lang="en-US"/>
+              <a:t>Dr. Naveen Kumar, Associate Professor, AIIT, AUP</a:t>
+            </a:r>
+          </a:p>
+        </p:txBody>
+      </p:sp>
     </p:spTree>
     <p:extLst>
       <p:ext uri="{BB962C8B-B14F-4D97-AF65-F5344CB8AC3E}">
@@ -26857,6 +29291,34 @@
           <a:lstStyle/>
           <a:p>
             <a:endParaRPr lang="en-US"/>
+          </a:p>
+        </p:txBody>
+      </p:sp>
+      <p:sp>
+        <p:nvSpPr>
+          <p:cNvPr id="4" name="Footer Placeholder 3">
+            <a:extLst>
+              <a:ext uri="{FF2B5EF4-FFF2-40B4-BE49-F238E27FC236}">
+                <a16:creationId xmlns:a16="http://schemas.microsoft.com/office/drawing/2014/main" id="{D641E7BA-3A81-080B-DDE6-D924C5AF8EF7}"/>
+              </a:ext>
+            </a:extLst>
+          </p:cNvPr>
+          <p:cNvSpPr>
+            <a:spLocks noGrp="1"/>
+          </p:cNvSpPr>
+          <p:nvPr>
+            <p:ph type="ftr" sz="quarter" idx="11"/>
+          </p:nvPr>
+        </p:nvSpPr>
+        <p:spPr/>
+        <p:txBody>
+          <a:bodyPr/>
+          <a:lstStyle/>
+          <a:p>
+            <a:r>
+              <a:rPr lang="en-US"/>
+              <a:t>Dr. Naveen Kumar, Associate Professor, AIIT, AUP</a:t>
+            </a:r>
           </a:p>
         </p:txBody>
       </p:sp>
@@ -27409,6 +29871,34 @@
           </a:p>
         </p:txBody>
       </p:sp>
+      <p:sp>
+        <p:nvSpPr>
+          <p:cNvPr id="4" name="Footer Placeholder 3">
+            <a:extLst>
+              <a:ext uri="{FF2B5EF4-FFF2-40B4-BE49-F238E27FC236}">
+                <a16:creationId xmlns:a16="http://schemas.microsoft.com/office/drawing/2014/main" id="{A681DC9C-8411-7939-5CD3-B6E85FEE5873}"/>
+              </a:ext>
+            </a:extLst>
+          </p:cNvPr>
+          <p:cNvSpPr>
+            <a:spLocks noGrp="1"/>
+          </p:cNvSpPr>
+          <p:nvPr>
+            <p:ph type="ftr" sz="quarter" idx="11"/>
+          </p:nvPr>
+        </p:nvSpPr>
+        <p:spPr/>
+        <p:txBody>
+          <a:bodyPr/>
+          <a:lstStyle/>
+          <a:p>
+            <a:r>
+              <a:rPr lang="en-US"/>
+              <a:t>Dr. Naveen Kumar, Associate Professor, AIIT, AUP</a:t>
+            </a:r>
+          </a:p>
+        </p:txBody>
+      </p:sp>
     </p:spTree>
     <p:extLst>
       <p:ext uri="{BB962C8B-B14F-4D97-AF65-F5344CB8AC3E}">
@@ -27654,6 +30144,34 @@
               <a:buNone/>
             </a:pPr>
             <a:endParaRPr lang="en-US" dirty="0"/>
+          </a:p>
+        </p:txBody>
+      </p:sp>
+      <p:sp>
+        <p:nvSpPr>
+          <p:cNvPr id="4" name="Footer Placeholder 3">
+            <a:extLst>
+              <a:ext uri="{FF2B5EF4-FFF2-40B4-BE49-F238E27FC236}">
+                <a16:creationId xmlns:a16="http://schemas.microsoft.com/office/drawing/2014/main" id="{CDB532D2-2B68-DC06-8670-4C879D6DA4AC}"/>
+              </a:ext>
+            </a:extLst>
+          </p:cNvPr>
+          <p:cNvSpPr>
+            <a:spLocks noGrp="1"/>
+          </p:cNvSpPr>
+          <p:nvPr>
+            <p:ph type="ftr" sz="quarter" idx="11"/>
+          </p:nvPr>
+        </p:nvSpPr>
+        <p:spPr/>
+        <p:txBody>
+          <a:bodyPr/>
+          <a:lstStyle/>
+          <a:p>
+            <a:r>
+              <a:rPr lang="en-US"/>
+              <a:t>Dr. Naveen Kumar, Associate Professor, AIIT, AUP</a:t>
+            </a:r>
           </a:p>
         </p:txBody>
       </p:sp>
@@ -27810,6 +30328,34 @@
               <a:t>(like multiple inheritance, operator overloading) are not supported by java moreover we are depending on primitive data types which are non objects. </a:t>
             </a:r>
             <a:endParaRPr lang="en-US" b="1" dirty="0"/>
+          </a:p>
+        </p:txBody>
+      </p:sp>
+      <p:sp>
+        <p:nvSpPr>
+          <p:cNvPr id="2" name="Footer Placeholder 1">
+            <a:extLst>
+              <a:ext uri="{FF2B5EF4-FFF2-40B4-BE49-F238E27FC236}">
+                <a16:creationId xmlns:a16="http://schemas.microsoft.com/office/drawing/2014/main" id="{996CE15F-FAA6-97B8-4FF9-ECD1B23FA7B9}"/>
+              </a:ext>
+            </a:extLst>
+          </p:cNvPr>
+          <p:cNvSpPr>
+            <a:spLocks noGrp="1"/>
+          </p:cNvSpPr>
+          <p:nvPr>
+            <p:ph type="ftr" sz="quarter" idx="11"/>
+          </p:nvPr>
+        </p:nvSpPr>
+        <p:spPr/>
+        <p:txBody>
+          <a:bodyPr/>
+          <a:lstStyle/>
+          <a:p>
+            <a:r>
+              <a:rPr lang="en-US"/>
+              <a:t>Dr. Naveen Kumar, Associate Professor, AIIT, AUP</a:t>
+            </a:r>
           </a:p>
         </p:txBody>
       </p:sp>
@@ -28383,6 +30929,34 @@
           <a:p>
             <a:pPr algn="ctr"/>
             <a:endParaRPr lang="en-US" dirty="0"/>
+          </a:p>
+        </p:txBody>
+      </p:sp>
+      <p:sp>
+        <p:nvSpPr>
+          <p:cNvPr id="3" name="Footer Placeholder 2">
+            <a:extLst>
+              <a:ext uri="{FF2B5EF4-FFF2-40B4-BE49-F238E27FC236}">
+                <a16:creationId xmlns:a16="http://schemas.microsoft.com/office/drawing/2014/main" id="{F36469CC-9A81-C474-09BE-71122D83AAF6}"/>
+              </a:ext>
+            </a:extLst>
+          </p:cNvPr>
+          <p:cNvSpPr>
+            <a:spLocks noGrp="1"/>
+          </p:cNvSpPr>
+          <p:nvPr>
+            <p:ph type="ftr" sz="quarter" idx="11"/>
+          </p:nvPr>
+        </p:nvSpPr>
+        <p:spPr/>
+        <p:txBody>
+          <a:bodyPr/>
+          <a:lstStyle/>
+          <a:p>
+            <a:r>
+              <a:rPr lang="en-US"/>
+              <a:t>Dr. Naveen Kumar, Associate Professor, AIIT, AUP</a:t>
+            </a:r>
           </a:p>
         </p:txBody>
       </p:sp>
@@ -28951,6 +31525,34 @@
               <a:t>-1] </a:t>
             </a:r>
             <a:endParaRPr lang="en-US" dirty="0"/>
+          </a:p>
+        </p:txBody>
+      </p:sp>
+      <p:sp>
+        <p:nvSpPr>
+          <p:cNvPr id="2" name="Footer Placeholder 1">
+            <a:extLst>
+              <a:ext uri="{FF2B5EF4-FFF2-40B4-BE49-F238E27FC236}">
+                <a16:creationId xmlns:a16="http://schemas.microsoft.com/office/drawing/2014/main" id="{F6CC47B3-14EA-8402-005F-D9A93A0B814D}"/>
+              </a:ext>
+            </a:extLst>
+          </p:cNvPr>
+          <p:cNvSpPr>
+            <a:spLocks noGrp="1"/>
+          </p:cNvSpPr>
+          <p:nvPr>
+            <p:ph type="ftr" sz="quarter" idx="11"/>
+          </p:nvPr>
+        </p:nvSpPr>
+        <p:spPr/>
+        <p:txBody>
+          <a:bodyPr/>
+          <a:lstStyle/>
+          <a:p>
+            <a:r>
+              <a:rPr lang="en-US"/>
+              <a:t>Dr. Naveen Kumar, Associate Professor, AIIT, AUP</a:t>
+            </a:r>
           </a:p>
         </p:txBody>
       </p:sp>
@@ -29493,6 +32095,34 @@
           </a:p>
         </p:txBody>
       </p:sp>
+      <p:sp>
+        <p:nvSpPr>
+          <p:cNvPr id="4" name="Footer Placeholder 3">
+            <a:extLst>
+              <a:ext uri="{FF2B5EF4-FFF2-40B4-BE49-F238E27FC236}">
+                <a16:creationId xmlns:a16="http://schemas.microsoft.com/office/drawing/2014/main" id="{6B8AEAB8-3B33-B347-9CDA-D52504F509C6}"/>
+              </a:ext>
+            </a:extLst>
+          </p:cNvPr>
+          <p:cNvSpPr>
+            <a:spLocks noGrp="1"/>
+          </p:cNvSpPr>
+          <p:nvPr>
+            <p:ph type="ftr" sz="quarter" idx="11"/>
+          </p:nvPr>
+        </p:nvSpPr>
+        <p:spPr/>
+        <p:txBody>
+          <a:bodyPr/>
+          <a:lstStyle/>
+          <a:p>
+            <a:r>
+              <a:rPr lang="en-US"/>
+              <a:t>Dr. Naveen Kumar, Associate Professor, AIIT, AUP</a:t>
+            </a:r>
+          </a:p>
+        </p:txBody>
+      </p:sp>
     </p:spTree>
     <p:extLst>
       <p:ext uri="{BB962C8B-B14F-4D97-AF65-F5344CB8AC3E}">
@@ -29830,6 +32460,34 @@
           </a:prstGeom>
         </p:spPr>
       </p:pic>
+      <p:sp>
+        <p:nvSpPr>
+          <p:cNvPr id="4" name="Footer Placeholder 3">
+            <a:extLst>
+              <a:ext uri="{FF2B5EF4-FFF2-40B4-BE49-F238E27FC236}">
+                <a16:creationId xmlns:a16="http://schemas.microsoft.com/office/drawing/2014/main" id="{02B50149-F7C3-11F7-D56C-0CD0AD0CE140}"/>
+              </a:ext>
+            </a:extLst>
+          </p:cNvPr>
+          <p:cNvSpPr>
+            <a:spLocks noGrp="1"/>
+          </p:cNvSpPr>
+          <p:nvPr>
+            <p:ph type="ftr" sz="quarter" idx="11"/>
+          </p:nvPr>
+        </p:nvSpPr>
+        <p:spPr/>
+        <p:txBody>
+          <a:bodyPr/>
+          <a:lstStyle/>
+          <a:p>
+            <a:r>
+              <a:rPr lang="en-US"/>
+              <a:t>Dr. Naveen Kumar, Associate Professor, AIIT, AUP</a:t>
+            </a:r>
+          </a:p>
+        </p:txBody>
+      </p:sp>
     </p:spTree>
     <p:extLst>
       <p:ext uri="{BB962C8B-B14F-4D97-AF65-F5344CB8AC3E}">
@@ -30385,6 +33043,34 @@
               <a:t>byte data type is best suitable if we are handling data in terms of streams either from the file or from the network. </a:t>
             </a:r>
             <a:endParaRPr lang="en-US" dirty="0"/>
+          </a:p>
+        </p:txBody>
+      </p:sp>
+      <p:sp>
+        <p:nvSpPr>
+          <p:cNvPr id="2" name="Footer Placeholder 1">
+            <a:extLst>
+              <a:ext uri="{FF2B5EF4-FFF2-40B4-BE49-F238E27FC236}">
+                <a16:creationId xmlns:a16="http://schemas.microsoft.com/office/drawing/2014/main" id="{D68CE3AE-465E-28F7-F969-1D4DF4EFEFFC}"/>
+              </a:ext>
+            </a:extLst>
+          </p:cNvPr>
+          <p:cNvSpPr>
+            <a:spLocks noGrp="1"/>
+          </p:cNvSpPr>
+          <p:nvPr>
+            <p:ph type="ftr" sz="quarter" idx="11"/>
+          </p:nvPr>
+        </p:nvSpPr>
+        <p:spPr/>
+        <p:txBody>
+          <a:bodyPr/>
+          <a:lstStyle/>
+          <a:p>
+            <a:r>
+              <a:rPr lang="en-US"/>
+              <a:t>Dr. Naveen Kumar, Associate Professor, AIIT, AUP</a:t>
+            </a:r>
           </a:p>
         </p:txBody>
       </p:sp>
@@ -31039,6 +33725,34 @@
               <a:t>Short data type is best suitable for 16 bit processors like 8086 but these processors are completely outdated and hence the corresponding short data type is also out data type.</a:t>
             </a:r>
             <a:endParaRPr lang="en-US" dirty="0"/>
+          </a:p>
+        </p:txBody>
+      </p:sp>
+      <p:sp>
+        <p:nvSpPr>
+          <p:cNvPr id="4" name="Footer Placeholder 3">
+            <a:extLst>
+              <a:ext uri="{FF2B5EF4-FFF2-40B4-BE49-F238E27FC236}">
+                <a16:creationId xmlns:a16="http://schemas.microsoft.com/office/drawing/2014/main" id="{3B3FB615-E9B8-9881-FE36-72D09BE1EF1F}"/>
+              </a:ext>
+            </a:extLst>
+          </p:cNvPr>
+          <p:cNvSpPr>
+            <a:spLocks noGrp="1"/>
+          </p:cNvSpPr>
+          <p:nvPr>
+            <p:ph type="ftr" sz="quarter" idx="11"/>
+          </p:nvPr>
+        </p:nvSpPr>
+        <p:spPr/>
+        <p:txBody>
+          <a:bodyPr/>
+          <a:lstStyle/>
+          <a:p>
+            <a:r>
+              <a:rPr lang="en-US"/>
+              <a:t>Dr. Naveen Kumar, Associate Professor, AIIT, AUP</a:t>
+            </a:r>
           </a:p>
         </p:txBody>
       </p:sp>
@@ -31846,6 +34560,34 @@
           </a:p>
         </p:txBody>
       </p:sp>
+      <p:sp>
+        <p:nvSpPr>
+          <p:cNvPr id="4" name="Footer Placeholder 3">
+            <a:extLst>
+              <a:ext uri="{FF2B5EF4-FFF2-40B4-BE49-F238E27FC236}">
+                <a16:creationId xmlns:a16="http://schemas.microsoft.com/office/drawing/2014/main" id="{85A563B5-3971-0B8E-2164-C4D5CA650F7E}"/>
+              </a:ext>
+            </a:extLst>
+          </p:cNvPr>
+          <p:cNvSpPr>
+            <a:spLocks noGrp="1"/>
+          </p:cNvSpPr>
+          <p:nvPr>
+            <p:ph type="ftr" sz="quarter" idx="11"/>
+          </p:nvPr>
+        </p:nvSpPr>
+        <p:spPr/>
+        <p:txBody>
+          <a:bodyPr/>
+          <a:lstStyle/>
+          <a:p>
+            <a:r>
+              <a:rPr lang="en-US"/>
+              <a:t>Dr. Naveen Kumar, Associate Professor, AIIT, AUP</a:t>
+            </a:r>
+          </a:p>
+        </p:txBody>
+      </p:sp>
     </p:spTree>
     <p:extLst>
       <p:ext uri="{BB962C8B-B14F-4D97-AF65-F5344CB8AC3E}">
@@ -32557,6 +35299,34 @@
               <a:t>Note: All the above data types (byte, short, int and long) can be used to represent whole numbers. If we want to represent real numbers then we should go for floating point data types. </a:t>
             </a:r>
             <a:endParaRPr lang="en-US" dirty="0"/>
+          </a:p>
+        </p:txBody>
+      </p:sp>
+      <p:sp>
+        <p:nvSpPr>
+          <p:cNvPr id="4" name="Footer Placeholder 3">
+            <a:extLst>
+              <a:ext uri="{FF2B5EF4-FFF2-40B4-BE49-F238E27FC236}">
+                <a16:creationId xmlns:a16="http://schemas.microsoft.com/office/drawing/2014/main" id="{7D74523C-1CD3-E864-5184-0DAE44BA5A50}"/>
+              </a:ext>
+            </a:extLst>
+          </p:cNvPr>
+          <p:cNvSpPr>
+            <a:spLocks noGrp="1"/>
+          </p:cNvSpPr>
+          <p:nvPr>
+            <p:ph type="ftr" sz="quarter" idx="11"/>
+          </p:nvPr>
+        </p:nvSpPr>
+        <p:spPr/>
+        <p:txBody>
+          <a:bodyPr/>
+          <a:lstStyle/>
+          <a:p>
+            <a:r>
+              <a:rPr lang="en-US"/>
+              <a:t>Dr. Naveen Kumar, Associate Professor, AIIT, AUP</a:t>
+            </a:r>
           </a:p>
         </p:txBody>
       </p:sp>
@@ -33372,6 +36142,34 @@
               <a:t>double follows double precision. </a:t>
             </a:r>
             <a:endParaRPr lang="en-US" dirty="0"/>
+          </a:p>
+        </p:txBody>
+      </p:sp>
+      <p:sp>
+        <p:nvSpPr>
+          <p:cNvPr id="4" name="Footer Placeholder 3">
+            <a:extLst>
+              <a:ext uri="{FF2B5EF4-FFF2-40B4-BE49-F238E27FC236}">
+                <a16:creationId xmlns:a16="http://schemas.microsoft.com/office/drawing/2014/main" id="{89C5267F-E1E1-0269-AAAD-30F1B166AD31}"/>
+              </a:ext>
+            </a:extLst>
+          </p:cNvPr>
+          <p:cNvSpPr>
+            <a:spLocks noGrp="1"/>
+          </p:cNvSpPr>
+          <p:nvPr>
+            <p:ph type="ftr" sz="quarter" idx="11"/>
+          </p:nvPr>
+        </p:nvSpPr>
+        <p:spPr/>
+        <p:txBody>
+          <a:bodyPr/>
+          <a:lstStyle/>
+          <a:p>
+            <a:r>
+              <a:rPr lang="en-US"/>
+              <a:t>Dr. Naveen Kumar, Associate Professor, AIIT, AUP</a:t>
+            </a:r>
           </a:p>
         </p:txBody>
       </p:sp>
@@ -34084,6 +36882,34 @@
           </a:p>
         </p:txBody>
       </p:sp>
+      <p:sp>
+        <p:nvSpPr>
+          <p:cNvPr id="4" name="Footer Placeholder 3">
+            <a:extLst>
+              <a:ext uri="{FF2B5EF4-FFF2-40B4-BE49-F238E27FC236}">
+                <a16:creationId xmlns:a16="http://schemas.microsoft.com/office/drawing/2014/main" id="{350B1F40-FC90-1F7C-09AB-B2AB6BC42471}"/>
+              </a:ext>
+            </a:extLst>
+          </p:cNvPr>
+          <p:cNvSpPr>
+            <a:spLocks noGrp="1"/>
+          </p:cNvSpPr>
+          <p:nvPr>
+            <p:ph type="ftr" sz="quarter" idx="11"/>
+          </p:nvPr>
+        </p:nvSpPr>
+        <p:spPr/>
+        <p:txBody>
+          <a:bodyPr/>
+          <a:lstStyle/>
+          <a:p>
+            <a:r>
+              <a:rPr lang="en-US"/>
+              <a:t>Dr. Naveen Kumar, Associate Professor, AIIT, AUP</a:t>
+            </a:r>
+          </a:p>
+        </p:txBody>
+      </p:sp>
     </p:spTree>
     <p:extLst>
       <p:ext uri="{BB962C8B-B14F-4D97-AF65-F5344CB8AC3E}">
@@ -34561,6 +37387,34 @@
               <a:t> loss of precision</a:t>
             </a:r>
             <a:endParaRPr lang="en-US" dirty="0"/>
+          </a:p>
+        </p:txBody>
+      </p:sp>
+      <p:sp>
+        <p:nvSpPr>
+          <p:cNvPr id="4" name="Footer Placeholder 3">
+            <a:extLst>
+              <a:ext uri="{FF2B5EF4-FFF2-40B4-BE49-F238E27FC236}">
+                <a16:creationId xmlns:a16="http://schemas.microsoft.com/office/drawing/2014/main" id="{33708EBC-5910-AF9E-2B2F-878B74F81941}"/>
+              </a:ext>
+            </a:extLst>
+          </p:cNvPr>
+          <p:cNvSpPr>
+            <a:spLocks noGrp="1"/>
+          </p:cNvSpPr>
+          <p:nvPr>
+            <p:ph type="ftr" sz="quarter" idx="11"/>
+          </p:nvPr>
+        </p:nvSpPr>
+        <p:spPr/>
+        <p:txBody>
+          <a:bodyPr/>
+          <a:lstStyle/>
+          <a:p>
+            <a:r>
+              <a:rPr lang="en-US"/>
+              <a:t>Dr. Naveen Kumar, Associate Professor, AIIT, AUP</a:t>
+            </a:r>
           </a:p>
         </p:txBody>
       </p:sp>
@@ -36072,6 +38926,34 @@
           </a:graphicData>
         </a:graphic>
       </p:graphicFrame>
+      <p:sp>
+        <p:nvSpPr>
+          <p:cNvPr id="3" name="Footer Placeholder 2">
+            <a:extLst>
+              <a:ext uri="{FF2B5EF4-FFF2-40B4-BE49-F238E27FC236}">
+                <a16:creationId xmlns:a16="http://schemas.microsoft.com/office/drawing/2014/main" id="{48612F7C-8E09-1367-4B40-81088B95848C}"/>
+              </a:ext>
+            </a:extLst>
+          </p:cNvPr>
+          <p:cNvSpPr>
+            <a:spLocks noGrp="1"/>
+          </p:cNvSpPr>
+          <p:nvPr>
+            <p:ph type="ftr" sz="quarter" idx="11"/>
+          </p:nvPr>
+        </p:nvSpPr>
+        <p:spPr/>
+        <p:txBody>
+          <a:bodyPr/>
+          <a:lstStyle/>
+          <a:p>
+            <a:r>
+              <a:rPr lang="en-US"/>
+              <a:t>Dr. Naveen Kumar, Associate Professor, AIIT, AUP</a:t>
+            </a:r>
+          </a:p>
+        </p:txBody>
+      </p:sp>
     </p:spTree>
     <p:extLst>
       <p:ext uri="{BB962C8B-B14F-4D97-AF65-F5344CB8AC3E}">
@@ -36403,6 +39285,34 @@
               <a:t>Example: int x=0x10; </a:t>
             </a:r>
             <a:endParaRPr lang="en-US" dirty="0"/>
+          </a:p>
+        </p:txBody>
+      </p:sp>
+      <p:sp>
+        <p:nvSpPr>
+          <p:cNvPr id="2" name="Footer Placeholder 1">
+            <a:extLst>
+              <a:ext uri="{FF2B5EF4-FFF2-40B4-BE49-F238E27FC236}">
+                <a16:creationId xmlns:a16="http://schemas.microsoft.com/office/drawing/2014/main" id="{3365AB95-4250-B587-56A6-999A728B0330}"/>
+              </a:ext>
+            </a:extLst>
+          </p:cNvPr>
+          <p:cNvSpPr>
+            <a:spLocks noGrp="1"/>
+          </p:cNvSpPr>
+          <p:nvPr>
+            <p:ph type="ftr" sz="quarter" idx="11"/>
+          </p:nvPr>
+        </p:nvSpPr>
+        <p:spPr/>
+        <p:txBody>
+          <a:bodyPr/>
+          <a:lstStyle/>
+          <a:p>
+            <a:r>
+              <a:rPr lang="en-US"/>
+              <a:t>Dr. Naveen Kumar, Associate Professor, AIIT, AUP</a:t>
+            </a:r>
           </a:p>
         </p:txBody>
       </p:sp>
@@ -37295,6 +40205,34 @@
           </a:p>
         </p:txBody>
       </p:sp>
+      <p:sp>
+        <p:nvSpPr>
+          <p:cNvPr id="4" name="Footer Placeholder 3">
+            <a:extLst>
+              <a:ext uri="{FF2B5EF4-FFF2-40B4-BE49-F238E27FC236}">
+                <a16:creationId xmlns:a16="http://schemas.microsoft.com/office/drawing/2014/main" id="{75DCD7AC-CF26-340F-4782-17B39826DE6B}"/>
+              </a:ext>
+            </a:extLst>
+          </p:cNvPr>
+          <p:cNvSpPr>
+            <a:spLocks noGrp="1"/>
+          </p:cNvSpPr>
+          <p:nvPr>
+            <p:ph type="ftr" sz="quarter" idx="11"/>
+          </p:nvPr>
+        </p:nvSpPr>
+        <p:spPr/>
+        <p:txBody>
+          <a:bodyPr/>
+          <a:lstStyle/>
+          <a:p>
+            <a:r>
+              <a:rPr lang="en-US"/>
+              <a:t>Dr. Naveen Kumar, Associate Professor, AIIT, AUP</a:t>
+            </a:r>
+          </a:p>
+        </p:txBody>
+      </p:sp>
     </p:spTree>
     <p:extLst>
       <p:ext uri="{BB962C8B-B14F-4D97-AF65-F5344CB8AC3E}">
@@ -37432,6 +40370,34 @@
             <a:r>
               <a:rPr lang="en-US" dirty="0"/>
               <a:t>("b: "+b);</a:t>
+            </a:r>
+          </a:p>
+        </p:txBody>
+      </p:sp>
+      <p:sp>
+        <p:nvSpPr>
+          <p:cNvPr id="4" name="Footer Placeholder 3">
+            <a:extLst>
+              <a:ext uri="{FF2B5EF4-FFF2-40B4-BE49-F238E27FC236}">
+                <a16:creationId xmlns:a16="http://schemas.microsoft.com/office/drawing/2014/main" id="{71E23501-D163-DCC6-4782-102794BEF304}"/>
+              </a:ext>
+            </a:extLst>
+          </p:cNvPr>
+          <p:cNvSpPr>
+            <a:spLocks noGrp="1"/>
+          </p:cNvSpPr>
+          <p:nvPr>
+            <p:ph type="ftr" sz="quarter" idx="11"/>
+          </p:nvPr>
+        </p:nvSpPr>
+        <p:spPr/>
+        <p:txBody>
+          <a:bodyPr/>
+          <a:lstStyle/>
+          <a:p>
+            <a:r>
+              <a:rPr lang="en-US"/>
+              <a:t>Dr. Naveen Kumar, Associate Professor, AIIT, AUP</a:t>
             </a:r>
           </a:p>
         </p:txBody>
@@ -37562,6 +40528,34 @@
             <a:r>
               <a:rPr lang="en-US" dirty="0"/>
               <a:t>		required : int</a:t>
+            </a:r>
+          </a:p>
+        </p:txBody>
+      </p:sp>
+      <p:sp>
+        <p:nvSpPr>
+          <p:cNvPr id="2" name="Footer Placeholder 1">
+            <a:extLst>
+              <a:ext uri="{FF2B5EF4-FFF2-40B4-BE49-F238E27FC236}">
+                <a16:creationId xmlns:a16="http://schemas.microsoft.com/office/drawing/2014/main" id="{D964A730-4F7E-26F9-00DB-F5665BE7B51F}"/>
+              </a:ext>
+            </a:extLst>
+          </p:cNvPr>
+          <p:cNvSpPr>
+            <a:spLocks noGrp="1"/>
+          </p:cNvSpPr>
+          <p:nvPr>
+            <p:ph type="ftr" sz="quarter" idx="11"/>
+          </p:nvPr>
+        </p:nvSpPr>
+        <p:spPr/>
+        <p:txBody>
+          <a:bodyPr/>
+          <a:lstStyle/>
+          <a:p>
+            <a:r>
+              <a:rPr lang="en-US"/>
+              <a:t>Dr. Naveen Kumar, Associate Professor, AIIT, AUP</a:t>
             </a:r>
           </a:p>
         </p:txBody>
@@ -38166,6 +41160,34 @@
           </a:p>
         </p:txBody>
       </p:sp>
+      <p:sp>
+        <p:nvSpPr>
+          <p:cNvPr id="2" name="Footer Placeholder 1">
+            <a:extLst>
+              <a:ext uri="{FF2B5EF4-FFF2-40B4-BE49-F238E27FC236}">
+                <a16:creationId xmlns:a16="http://schemas.microsoft.com/office/drawing/2014/main" id="{43CCF3AE-F859-ABD4-FA2C-CE659972EC4C}"/>
+              </a:ext>
+            </a:extLst>
+          </p:cNvPr>
+          <p:cNvSpPr>
+            <a:spLocks noGrp="1"/>
+          </p:cNvSpPr>
+          <p:nvPr>
+            <p:ph type="ftr" sz="quarter" idx="11"/>
+          </p:nvPr>
+        </p:nvSpPr>
+        <p:spPr/>
+        <p:txBody>
+          <a:bodyPr/>
+          <a:lstStyle/>
+          <a:p>
+            <a:r>
+              <a:rPr lang="en-US"/>
+              <a:t>Dr. Naveen Kumar, Associate Professor, AIIT, AUP</a:t>
+            </a:r>
+          </a:p>
+        </p:txBody>
+      </p:sp>
     </p:spTree>
     <p:extLst>
       <p:ext uri="{BB962C8B-B14F-4D97-AF65-F5344CB8AC3E}">
@@ -38941,6 +41963,34 @@
           </a:p>
         </p:txBody>
       </p:sp>
+      <p:sp>
+        <p:nvSpPr>
+          <p:cNvPr id="4" name="Footer Placeholder 3">
+            <a:extLst>
+              <a:ext uri="{FF2B5EF4-FFF2-40B4-BE49-F238E27FC236}">
+                <a16:creationId xmlns:a16="http://schemas.microsoft.com/office/drawing/2014/main" id="{9EBDE993-F42F-91A9-0794-DAEEF3CC74E4}"/>
+              </a:ext>
+            </a:extLst>
+          </p:cNvPr>
+          <p:cNvSpPr>
+            <a:spLocks noGrp="1"/>
+          </p:cNvSpPr>
+          <p:nvPr>
+            <p:ph type="ftr" sz="quarter" idx="11"/>
+          </p:nvPr>
+        </p:nvSpPr>
+        <p:spPr/>
+        <p:txBody>
+          <a:bodyPr/>
+          <a:lstStyle/>
+          <a:p>
+            <a:r>
+              <a:rPr lang="en-US"/>
+              <a:t>Dr. Naveen Kumar, Associate Professor, AIIT, AUP</a:t>
+            </a:r>
+          </a:p>
+        </p:txBody>
+      </p:sp>
     </p:spTree>
     <p:extLst>
       <p:ext uri="{BB962C8B-B14F-4D97-AF65-F5344CB8AC3E}">
@@ -39124,6 +42174,34 @@
             <a:r>
               <a:rPr lang="en-US" dirty="0"/>
               <a:t>float f=10e2F;			(valid)</a:t>
+            </a:r>
+          </a:p>
+        </p:txBody>
+      </p:sp>
+      <p:sp>
+        <p:nvSpPr>
+          <p:cNvPr id="2" name="Footer Placeholder 1">
+            <a:extLst>
+              <a:ext uri="{FF2B5EF4-FFF2-40B4-BE49-F238E27FC236}">
+                <a16:creationId xmlns:a16="http://schemas.microsoft.com/office/drawing/2014/main" id="{09521752-27BE-5C80-41FA-6FA8955BD70A}"/>
+              </a:ext>
+            </a:extLst>
+          </p:cNvPr>
+          <p:cNvSpPr>
+            <a:spLocks noGrp="1"/>
+          </p:cNvSpPr>
+          <p:nvPr>
+            <p:ph type="ftr" sz="quarter" idx="11"/>
+          </p:nvPr>
+        </p:nvSpPr>
+        <p:spPr/>
+        <p:txBody>
+          <a:bodyPr/>
+          <a:lstStyle/>
+          <a:p>
+            <a:r>
+              <a:rPr lang="en-US"/>
+              <a:t>Dr. Naveen Kumar, Associate Professor, AIIT, AUP</a:t>
             </a:r>
           </a:p>
         </p:txBody>
@@ -40022,6 +43100,34 @@
           </a:p>
         </p:txBody>
       </p:sp>
+      <p:sp>
+        <p:nvSpPr>
+          <p:cNvPr id="4" name="Footer Placeholder 3">
+            <a:extLst>
+              <a:ext uri="{FF2B5EF4-FFF2-40B4-BE49-F238E27FC236}">
+                <a16:creationId xmlns:a16="http://schemas.microsoft.com/office/drawing/2014/main" id="{FF15DF27-74E3-95B2-E987-3E45C6DCB0CC}"/>
+              </a:ext>
+            </a:extLst>
+          </p:cNvPr>
+          <p:cNvSpPr>
+            <a:spLocks noGrp="1"/>
+          </p:cNvSpPr>
+          <p:nvPr>
+            <p:ph type="ftr" sz="quarter" idx="11"/>
+          </p:nvPr>
+        </p:nvSpPr>
+        <p:spPr/>
+        <p:txBody>
+          <a:bodyPr/>
+          <a:lstStyle/>
+          <a:p>
+            <a:r>
+              <a:rPr lang="en-US"/>
+              <a:t>Dr. Naveen Kumar, Associate Professor, AIIT, AUP</a:t>
+            </a:r>
+          </a:p>
+        </p:txBody>
+      </p:sp>
     </p:spTree>
     <p:extLst>
       <p:ext uri="{BB962C8B-B14F-4D97-AF65-F5344CB8AC3E}">
@@ -40116,6 +43222,34 @@
           </a:xfrm>
         </p:spPr>
       </p:pic>
+      <p:sp>
+        <p:nvSpPr>
+          <p:cNvPr id="3" name="Footer Placeholder 2">
+            <a:extLst>
+              <a:ext uri="{FF2B5EF4-FFF2-40B4-BE49-F238E27FC236}">
+                <a16:creationId xmlns:a16="http://schemas.microsoft.com/office/drawing/2014/main" id="{1C14FA9C-4204-42A7-ADCE-A7B0B63B3B4C}"/>
+              </a:ext>
+            </a:extLst>
+          </p:cNvPr>
+          <p:cNvSpPr>
+            <a:spLocks noGrp="1"/>
+          </p:cNvSpPr>
+          <p:nvPr>
+            <p:ph type="ftr" sz="quarter" idx="11"/>
+          </p:nvPr>
+        </p:nvSpPr>
+        <p:spPr/>
+        <p:txBody>
+          <a:bodyPr/>
+          <a:lstStyle/>
+          <a:p>
+            <a:r>
+              <a:rPr lang="en-US"/>
+              <a:t>Dr. Naveen Kumar, Associate Professor, AIIT, AUP</a:t>
+            </a:r>
+          </a:p>
+        </p:txBody>
+      </p:sp>
     </p:spTree>
     <p:extLst>
       <p:ext uri="{BB962C8B-B14F-4D97-AF65-F5344CB8AC3E}">
@@ -40394,6 +43528,34 @@
             <a:r>
               <a:rPr lang="en-US" dirty="0"/>
               <a:t>=65536; //C.E: possible loss of precision(invalid)</a:t>
+            </a:r>
+          </a:p>
+        </p:txBody>
+      </p:sp>
+      <p:sp>
+        <p:nvSpPr>
+          <p:cNvPr id="4" name="Footer Placeholder 3">
+            <a:extLst>
+              <a:ext uri="{FF2B5EF4-FFF2-40B4-BE49-F238E27FC236}">
+                <a16:creationId xmlns:a16="http://schemas.microsoft.com/office/drawing/2014/main" id="{0A583F9C-B627-802E-9AF3-06DC0EEDF7D5}"/>
+              </a:ext>
+            </a:extLst>
+          </p:cNvPr>
+          <p:cNvSpPr>
+            <a:spLocks noGrp="1"/>
+          </p:cNvSpPr>
+          <p:nvPr>
+            <p:ph type="ftr" sz="quarter" idx="11"/>
+          </p:nvPr>
+        </p:nvSpPr>
+        <p:spPr/>
+        <p:txBody>
+          <a:bodyPr/>
+          <a:lstStyle/>
+          <a:p>
+            <a:r>
+              <a:rPr lang="en-US"/>
+              <a:t>Dr. Naveen Kumar, Associate Professor, AIIT, AUP</a:t>
             </a:r>
           </a:p>
         </p:txBody>
@@ -41119,6 +44281,34 @@
           </a:p>
         </p:txBody>
       </p:sp>
+      <p:sp>
+        <p:nvSpPr>
+          <p:cNvPr id="2" name="Footer Placeholder 1">
+            <a:extLst>
+              <a:ext uri="{FF2B5EF4-FFF2-40B4-BE49-F238E27FC236}">
+                <a16:creationId xmlns:a16="http://schemas.microsoft.com/office/drawing/2014/main" id="{8F1E80A8-72E0-20B2-D56D-D865D5449E8A}"/>
+              </a:ext>
+            </a:extLst>
+          </p:cNvPr>
+          <p:cNvSpPr>
+            <a:spLocks noGrp="1"/>
+          </p:cNvSpPr>
+          <p:nvPr>
+            <p:ph type="ftr" sz="quarter" idx="11"/>
+          </p:nvPr>
+        </p:nvSpPr>
+        <p:spPr/>
+        <p:txBody>
+          <a:bodyPr/>
+          <a:lstStyle/>
+          <a:p>
+            <a:r>
+              <a:rPr lang="en-US"/>
+              <a:t>Dr. Naveen Kumar, Associate Professor, AIIT, AUP</a:t>
+            </a:r>
+          </a:p>
+        </p:txBody>
+      </p:sp>
     </p:spTree>
     <p:extLst>
       <p:ext uri="{BB962C8B-B14F-4D97-AF65-F5344CB8AC3E}">
@@ -41736,6 +44926,34 @@
           </a:p>
         </p:txBody>
       </p:sp>
+      <p:sp>
+        <p:nvSpPr>
+          <p:cNvPr id="4" name="Footer Placeholder 3">
+            <a:extLst>
+              <a:ext uri="{FF2B5EF4-FFF2-40B4-BE49-F238E27FC236}">
+                <a16:creationId xmlns:a16="http://schemas.microsoft.com/office/drawing/2014/main" id="{CEB25B54-6D28-5DC5-4838-78904FD0B671}"/>
+              </a:ext>
+            </a:extLst>
+          </p:cNvPr>
+          <p:cNvSpPr>
+            <a:spLocks noGrp="1"/>
+          </p:cNvSpPr>
+          <p:nvPr>
+            <p:ph type="ftr" sz="quarter" idx="11"/>
+          </p:nvPr>
+        </p:nvSpPr>
+        <p:spPr/>
+        <p:txBody>
+          <a:bodyPr/>
+          <a:lstStyle/>
+          <a:p>
+            <a:r>
+              <a:rPr lang="en-US"/>
+              <a:t>Dr. Naveen Kumar, Associate Professor, AIIT, AUP</a:t>
+            </a:r>
+          </a:p>
+        </p:txBody>
+      </p:sp>
     </p:spTree>
     <p:extLst>
       <p:ext uri="{BB962C8B-B14F-4D97-AF65-F5344CB8AC3E}">
@@ -41943,6 +45161,34 @@
           </a:p>
           <a:p>
             <a:endParaRPr lang="en-US" dirty="0"/>
+          </a:p>
+        </p:txBody>
+      </p:sp>
+      <p:sp>
+        <p:nvSpPr>
+          <p:cNvPr id="4" name="Footer Placeholder 3">
+            <a:extLst>
+              <a:ext uri="{FF2B5EF4-FFF2-40B4-BE49-F238E27FC236}">
+                <a16:creationId xmlns:a16="http://schemas.microsoft.com/office/drawing/2014/main" id="{94B4DB29-1DF4-CF75-0622-1FE8896F6ADE}"/>
+              </a:ext>
+            </a:extLst>
+          </p:cNvPr>
+          <p:cNvSpPr>
+            <a:spLocks noGrp="1"/>
+          </p:cNvSpPr>
+          <p:nvPr>
+            <p:ph type="ftr" sz="quarter" idx="11"/>
+          </p:nvPr>
+        </p:nvSpPr>
+        <p:spPr/>
+        <p:txBody>
+          <a:bodyPr/>
+          <a:lstStyle/>
+          <a:p>
+            <a:r>
+              <a:rPr lang="en-US"/>
+              <a:t>Dr. Naveen Kumar, Associate Professor, AIIT, AUP</a:t>
+            </a:r>
           </a:p>
         </p:txBody>
       </p:sp>
@@ -42116,6 +45362,34 @@
           </a:p>
         </p:txBody>
       </p:sp>
+      <p:sp>
+        <p:nvSpPr>
+          <p:cNvPr id="4" name="Footer Placeholder 3">
+            <a:extLst>
+              <a:ext uri="{FF2B5EF4-FFF2-40B4-BE49-F238E27FC236}">
+                <a16:creationId xmlns:a16="http://schemas.microsoft.com/office/drawing/2014/main" id="{AD6ED8B4-46E3-DF35-3958-E00E47CBC7CE}"/>
+              </a:ext>
+            </a:extLst>
+          </p:cNvPr>
+          <p:cNvSpPr>
+            <a:spLocks noGrp="1"/>
+          </p:cNvSpPr>
+          <p:nvPr>
+            <p:ph type="ftr" sz="quarter" idx="11"/>
+          </p:nvPr>
+        </p:nvSpPr>
+        <p:spPr/>
+        <p:txBody>
+          <a:bodyPr/>
+          <a:lstStyle/>
+          <a:p>
+            <a:r>
+              <a:rPr lang="en-US"/>
+              <a:t>Dr. Naveen Kumar, Associate Professor, AIIT, AUP</a:t>
+            </a:r>
+          </a:p>
+        </p:txBody>
+      </p:sp>
     </p:spTree>
     <p:extLst>
       <p:ext uri="{BB962C8B-B14F-4D97-AF65-F5344CB8AC3E}">
@@ -42290,6 +45564,34 @@
             <a:r>
               <a:rPr lang="en-US" dirty="0"/>
               <a:t>floating-point data types</a:t>
+            </a:r>
+          </a:p>
+        </p:txBody>
+      </p:sp>
+      <p:sp>
+        <p:nvSpPr>
+          <p:cNvPr id="2" name="Footer Placeholder 1">
+            <a:extLst>
+              <a:ext uri="{FF2B5EF4-FFF2-40B4-BE49-F238E27FC236}">
+                <a16:creationId xmlns:a16="http://schemas.microsoft.com/office/drawing/2014/main" id="{1A89A810-00A5-ECCF-85E0-B430320A5409}"/>
+              </a:ext>
+            </a:extLst>
+          </p:cNvPr>
+          <p:cNvSpPr>
+            <a:spLocks noGrp="1"/>
+          </p:cNvSpPr>
+          <p:nvPr>
+            <p:ph type="ftr" sz="quarter" idx="11"/>
+          </p:nvPr>
+        </p:nvSpPr>
+        <p:spPr/>
+        <p:txBody>
+          <a:bodyPr/>
+          <a:lstStyle/>
+          <a:p>
+            <a:r>
+              <a:rPr lang="en-US"/>
+              <a:t>Dr. Naveen Kumar, Associate Professor, AIIT, AUP</a:t>
             </a:r>
           </a:p>
         </p:txBody>
@@ -42381,6 +45683,34 @@
           </a:xfrm>
         </p:spPr>
       </p:pic>
+      <p:sp>
+        <p:nvSpPr>
+          <p:cNvPr id="3" name="Footer Placeholder 2">
+            <a:extLst>
+              <a:ext uri="{FF2B5EF4-FFF2-40B4-BE49-F238E27FC236}">
+                <a16:creationId xmlns:a16="http://schemas.microsoft.com/office/drawing/2014/main" id="{A78D4FFE-ACE5-A022-3B39-FB453428E9E6}"/>
+              </a:ext>
+            </a:extLst>
+          </p:cNvPr>
+          <p:cNvSpPr>
+            <a:spLocks noGrp="1"/>
+          </p:cNvSpPr>
+          <p:nvPr>
+            <p:ph type="ftr" sz="quarter" idx="11"/>
+          </p:nvPr>
+        </p:nvSpPr>
+        <p:spPr/>
+        <p:txBody>
+          <a:bodyPr/>
+          <a:lstStyle/>
+          <a:p>
+            <a:r>
+              <a:rPr lang="en-US"/>
+              <a:t>Dr. Naveen Kumar, Associate Professor, AIIT, AUP</a:t>
+            </a:r>
+          </a:p>
+        </p:txBody>
+      </p:sp>
     </p:spTree>
     <p:extLst>
       <p:ext uri="{BB962C8B-B14F-4D97-AF65-F5344CB8AC3E}">
@@ -42648,6 +45978,34 @@
                 <a:latin typeface="Georgia" panose="02040502050405020303" pitchFamily="18" charset="0"/>
               </a:rPr>
               <a:t>Don't worry about the length of the name. A longer name that sums up the identifier perfectly is preferable to a shorter name that might be quick to type but ambiguous.</a:t>
+            </a:r>
+          </a:p>
+        </p:txBody>
+      </p:sp>
+      <p:sp>
+        <p:nvSpPr>
+          <p:cNvPr id="4" name="Footer Placeholder 3">
+            <a:extLst>
+              <a:ext uri="{FF2B5EF4-FFF2-40B4-BE49-F238E27FC236}">
+                <a16:creationId xmlns:a16="http://schemas.microsoft.com/office/drawing/2014/main" id="{D00980AE-9B94-FDE5-F94C-3EA5CA833257}"/>
+              </a:ext>
+            </a:extLst>
+          </p:cNvPr>
+          <p:cNvSpPr>
+            <a:spLocks noGrp="1"/>
+          </p:cNvSpPr>
+          <p:nvPr>
+            <p:ph type="ftr" sz="quarter" idx="11"/>
+          </p:nvPr>
+        </p:nvSpPr>
+        <p:spPr/>
+        <p:txBody>
+          <a:bodyPr/>
+          <a:lstStyle/>
+          <a:p>
+            <a:r>
+              <a:rPr lang="en-US"/>
+              <a:t>Dr. Naveen Kumar, Associate Professor, AIIT, AUP</a:t>
             </a:r>
           </a:p>
         </p:txBody>
@@ -43261,6 +46619,34 @@
           </a:p>
         </p:txBody>
       </p:sp>
+      <p:sp>
+        <p:nvSpPr>
+          <p:cNvPr id="2" name="Footer Placeholder 1">
+            <a:extLst>
+              <a:ext uri="{FF2B5EF4-FFF2-40B4-BE49-F238E27FC236}">
+                <a16:creationId xmlns:a16="http://schemas.microsoft.com/office/drawing/2014/main" id="{38AD1D53-DC9C-30C7-84F0-E3B2B3800E4E}"/>
+              </a:ext>
+            </a:extLst>
+          </p:cNvPr>
+          <p:cNvSpPr>
+            <a:spLocks noGrp="1"/>
+          </p:cNvSpPr>
+          <p:nvPr>
+            <p:ph type="ftr" sz="quarter" idx="11"/>
+          </p:nvPr>
+        </p:nvSpPr>
+        <p:spPr/>
+        <p:txBody>
+          <a:bodyPr/>
+          <a:lstStyle/>
+          <a:p>
+            <a:r>
+              <a:rPr lang="en-US"/>
+              <a:t>Dr. Naveen Kumar, Associate Professor, AIIT, AUP</a:t>
+            </a:r>
+          </a:p>
+        </p:txBody>
+      </p:sp>
     </p:spTree>
     <p:extLst>
       <p:ext uri="{BB962C8B-B14F-4D97-AF65-F5344CB8AC3E}">
@@ -43884,6 +47270,34 @@
           </a:p>
           <a:p>
             <a:endParaRPr lang="en-US" dirty="0"/>
+          </a:p>
+        </p:txBody>
+      </p:sp>
+      <p:sp>
+        <p:nvSpPr>
+          <p:cNvPr id="2" name="Footer Placeholder 1">
+            <a:extLst>
+              <a:ext uri="{FF2B5EF4-FFF2-40B4-BE49-F238E27FC236}">
+                <a16:creationId xmlns:a16="http://schemas.microsoft.com/office/drawing/2014/main" id="{3CC3AFCB-7EB5-43A2-23E1-986C31DF3DC0}"/>
+              </a:ext>
+            </a:extLst>
+          </p:cNvPr>
+          <p:cNvSpPr>
+            <a:spLocks noGrp="1"/>
+          </p:cNvSpPr>
+          <p:nvPr>
+            <p:ph type="ftr" sz="quarter" idx="11"/>
+          </p:nvPr>
+        </p:nvSpPr>
+        <p:spPr/>
+        <p:txBody>
+          <a:bodyPr/>
+          <a:lstStyle/>
+          <a:p>
+            <a:r>
+              <a:rPr lang="en-US"/>
+              <a:t>Dr. Naveen Kumar, Associate Professor, AIIT, AUP</a:t>
+            </a:r>
           </a:p>
         </p:txBody>
       </p:sp>
@@ -43984,6 +47398,34 @@
           </a:p>
         </p:txBody>
       </p:sp>
+      <p:sp>
+        <p:nvSpPr>
+          <p:cNvPr id="4" name="Footer Placeholder 3">
+            <a:extLst>
+              <a:ext uri="{FF2B5EF4-FFF2-40B4-BE49-F238E27FC236}">
+                <a16:creationId xmlns:a16="http://schemas.microsoft.com/office/drawing/2014/main" id="{F0B867A0-81FA-1235-BD6D-504BE86F46C0}"/>
+              </a:ext>
+            </a:extLst>
+          </p:cNvPr>
+          <p:cNvSpPr>
+            <a:spLocks noGrp="1"/>
+          </p:cNvSpPr>
+          <p:nvPr>
+            <p:ph type="ftr" sz="quarter" idx="11"/>
+          </p:nvPr>
+        </p:nvSpPr>
+        <p:spPr/>
+        <p:txBody>
+          <a:bodyPr/>
+          <a:lstStyle/>
+          <a:p>
+            <a:r>
+              <a:rPr lang="en-US"/>
+              <a:t>Dr. Naveen Kumar, Associate Professor, AIIT, AUP</a:t>
+            </a:r>
+          </a:p>
+        </p:txBody>
+      </p:sp>
     </p:spTree>
     <p:extLst>
       <p:ext uri="{BB962C8B-B14F-4D97-AF65-F5344CB8AC3E}">
@@ -44275,6 +47717,34 @@
               <a:rPr lang="en-IN"/>
             </a:br>
             <a:endParaRPr lang="en-US" dirty="0"/>
+          </a:p>
+        </p:txBody>
+      </p:sp>
+      <p:sp>
+        <p:nvSpPr>
+          <p:cNvPr id="4" name="Footer Placeholder 3">
+            <a:extLst>
+              <a:ext uri="{FF2B5EF4-FFF2-40B4-BE49-F238E27FC236}">
+                <a16:creationId xmlns:a16="http://schemas.microsoft.com/office/drawing/2014/main" id="{407E6A83-8541-4830-6F6D-922AB6B8C725}"/>
+              </a:ext>
+            </a:extLst>
+          </p:cNvPr>
+          <p:cNvSpPr>
+            <a:spLocks noGrp="1"/>
+          </p:cNvSpPr>
+          <p:nvPr>
+            <p:ph type="ftr" sz="quarter" idx="11"/>
+          </p:nvPr>
+        </p:nvSpPr>
+        <p:spPr/>
+        <p:txBody>
+          <a:bodyPr/>
+          <a:lstStyle/>
+          <a:p>
+            <a:r>
+              <a:rPr lang="en-US"/>
+              <a:t>Dr. Naveen Kumar, Associate Professor, AIIT, AUP</a:t>
+            </a:r>
           </a:p>
         </p:txBody>
       </p:sp>
@@ -44368,6 +47838,34 @@
           </a:p>
         </p:txBody>
       </p:sp>
+      <p:sp>
+        <p:nvSpPr>
+          <p:cNvPr id="4" name="Footer Placeholder 3">
+            <a:extLst>
+              <a:ext uri="{FF2B5EF4-FFF2-40B4-BE49-F238E27FC236}">
+                <a16:creationId xmlns:a16="http://schemas.microsoft.com/office/drawing/2014/main" id="{832E471E-A21E-C981-8335-95C05ACFDB01}"/>
+              </a:ext>
+            </a:extLst>
+          </p:cNvPr>
+          <p:cNvSpPr>
+            <a:spLocks noGrp="1"/>
+          </p:cNvSpPr>
+          <p:nvPr>
+            <p:ph type="ftr" sz="quarter" idx="11"/>
+          </p:nvPr>
+        </p:nvSpPr>
+        <p:spPr/>
+        <p:txBody>
+          <a:bodyPr/>
+          <a:lstStyle/>
+          <a:p>
+            <a:r>
+              <a:rPr lang="en-US"/>
+              <a:t>Dr. Naveen Kumar, Associate Professor, AIIT, AUP</a:t>
+            </a:r>
+          </a:p>
+        </p:txBody>
+      </p:sp>
     </p:spTree>
     <p:extLst>
       <p:ext uri="{BB962C8B-B14F-4D97-AF65-F5344CB8AC3E}">
@@ -44540,6 +48038,34 @@
             <a:r>
               <a:rPr lang="en-US"/>
               <a:t>}</a:t>
+            </a:r>
+          </a:p>
+        </p:txBody>
+      </p:sp>
+      <p:sp>
+        <p:nvSpPr>
+          <p:cNvPr id="4" name="Footer Placeholder 3">
+            <a:extLst>
+              <a:ext uri="{FF2B5EF4-FFF2-40B4-BE49-F238E27FC236}">
+                <a16:creationId xmlns:a16="http://schemas.microsoft.com/office/drawing/2014/main" id="{92A7A016-2EB4-4256-4C2D-6B414942F262}"/>
+              </a:ext>
+            </a:extLst>
+          </p:cNvPr>
+          <p:cNvSpPr>
+            <a:spLocks noGrp="1"/>
+          </p:cNvSpPr>
+          <p:nvPr>
+            <p:ph type="ftr" sz="quarter" idx="11"/>
+          </p:nvPr>
+        </p:nvSpPr>
+        <p:spPr/>
+        <p:txBody>
+          <a:bodyPr/>
+          <a:lstStyle/>
+          <a:p>
+            <a:r>
+              <a:rPr lang="en-US"/>
+              <a:t>Dr. Naveen Kumar, Associate Professor, AIIT, AUP</a:t>
             </a:r>
           </a:p>
         </p:txBody>
@@ -44824,6 +48350,34 @@
           <a:p>
             <a:pPr algn="ctr"/>
             <a:endParaRPr lang="en-US" dirty="0"/>
+          </a:p>
+        </p:txBody>
+      </p:sp>
+      <p:sp>
+        <p:nvSpPr>
+          <p:cNvPr id="7" name="Footer Placeholder 6">
+            <a:extLst>
+              <a:ext uri="{FF2B5EF4-FFF2-40B4-BE49-F238E27FC236}">
+                <a16:creationId xmlns:a16="http://schemas.microsoft.com/office/drawing/2014/main" id="{A8B77A08-71F0-89CB-F23F-6A3F96089E46}"/>
+              </a:ext>
+            </a:extLst>
+          </p:cNvPr>
+          <p:cNvSpPr>
+            <a:spLocks noGrp="1"/>
+          </p:cNvSpPr>
+          <p:nvPr>
+            <p:ph type="ftr" sz="quarter" idx="11"/>
+          </p:nvPr>
+        </p:nvSpPr>
+        <p:spPr/>
+        <p:txBody>
+          <a:bodyPr/>
+          <a:lstStyle/>
+          <a:p>
+            <a:r>
+              <a:rPr lang="en-US"/>
+              <a:t>Dr. Naveen Kumar, Associate Professor, AIIT, AUP</a:t>
+            </a:r>
           </a:p>
         </p:txBody>
       </p:sp>
@@ -45281,6 +48835,34 @@
           </a:p>
         </p:txBody>
       </p:sp>
+      <p:sp>
+        <p:nvSpPr>
+          <p:cNvPr id="4" name="Footer Placeholder 3">
+            <a:extLst>
+              <a:ext uri="{FF2B5EF4-FFF2-40B4-BE49-F238E27FC236}">
+                <a16:creationId xmlns:a16="http://schemas.microsoft.com/office/drawing/2014/main" id="{F297EE98-0F50-6A12-A400-D2163B2699B4}"/>
+              </a:ext>
+            </a:extLst>
+          </p:cNvPr>
+          <p:cNvSpPr>
+            <a:spLocks noGrp="1"/>
+          </p:cNvSpPr>
+          <p:nvPr>
+            <p:ph type="ftr" sz="quarter" idx="11"/>
+          </p:nvPr>
+        </p:nvSpPr>
+        <p:spPr/>
+        <p:txBody>
+          <a:bodyPr/>
+          <a:lstStyle/>
+          <a:p>
+            <a:r>
+              <a:rPr lang="en-US"/>
+              <a:t>Dr. Naveen Kumar, Associate Professor, AIIT, AUP</a:t>
+            </a:r>
+          </a:p>
+        </p:txBody>
+      </p:sp>
     </p:spTree>
     <p:extLst>
       <p:ext uri="{BB962C8B-B14F-4D97-AF65-F5344CB8AC3E}">
@@ -45747,6 +49329,34 @@
           <a:p>
             <a:pPr algn="ctr"/>
             <a:endParaRPr lang="en-US" dirty="0"/>
+          </a:p>
+        </p:txBody>
+      </p:sp>
+      <p:sp>
+        <p:nvSpPr>
+          <p:cNvPr id="6" name="Footer Placeholder 5">
+            <a:extLst>
+              <a:ext uri="{FF2B5EF4-FFF2-40B4-BE49-F238E27FC236}">
+                <a16:creationId xmlns:a16="http://schemas.microsoft.com/office/drawing/2014/main" id="{68F234A5-15DF-3802-E9FD-E6495DCD152A}"/>
+              </a:ext>
+            </a:extLst>
+          </p:cNvPr>
+          <p:cNvSpPr>
+            <a:spLocks noGrp="1"/>
+          </p:cNvSpPr>
+          <p:nvPr>
+            <p:ph type="ftr" sz="quarter" idx="11"/>
+          </p:nvPr>
+        </p:nvSpPr>
+        <p:spPr/>
+        <p:txBody>
+          <a:bodyPr/>
+          <a:lstStyle/>
+          <a:p>
+            <a:r>
+              <a:rPr lang="en-US"/>
+              <a:t>Dr. Naveen Kumar, Associate Professor, AIIT, AUP</a:t>
+            </a:r>
           </a:p>
         </p:txBody>
       </p:sp>
@@ -46179,6 +49789,34 @@
           </a:p>
         </p:txBody>
       </p:sp>
+      <p:sp>
+        <p:nvSpPr>
+          <p:cNvPr id="2" name="Footer Placeholder 1">
+            <a:extLst>
+              <a:ext uri="{FF2B5EF4-FFF2-40B4-BE49-F238E27FC236}">
+                <a16:creationId xmlns:a16="http://schemas.microsoft.com/office/drawing/2014/main" id="{44B9FB25-755C-3598-2295-245245A3D21E}"/>
+              </a:ext>
+            </a:extLst>
+          </p:cNvPr>
+          <p:cNvSpPr>
+            <a:spLocks noGrp="1"/>
+          </p:cNvSpPr>
+          <p:nvPr>
+            <p:ph type="ftr" sz="quarter" idx="11"/>
+          </p:nvPr>
+        </p:nvSpPr>
+        <p:spPr/>
+        <p:txBody>
+          <a:bodyPr/>
+          <a:lstStyle/>
+          <a:p>
+            <a:r>
+              <a:rPr lang="en-US"/>
+              <a:t>Dr. Naveen Kumar, Associate Professor, AIIT, AUP</a:t>
+            </a:r>
+          </a:p>
+        </p:txBody>
+      </p:sp>
     </p:spTree>
     <p:extLst>
       <p:ext uri="{BB962C8B-B14F-4D97-AF65-F5344CB8AC3E}">
@@ -46434,6 +50072,34 @@
           <a:p>
             <a:pPr algn="ctr"/>
             <a:endParaRPr lang="en-US" dirty="0"/>
+          </a:p>
+        </p:txBody>
+      </p:sp>
+      <p:sp>
+        <p:nvSpPr>
+          <p:cNvPr id="2" name="Footer Placeholder 1">
+            <a:extLst>
+              <a:ext uri="{FF2B5EF4-FFF2-40B4-BE49-F238E27FC236}">
+                <a16:creationId xmlns:a16="http://schemas.microsoft.com/office/drawing/2014/main" id="{E9463AD6-21C9-E97C-DC88-BCBE42272EF0}"/>
+              </a:ext>
+            </a:extLst>
+          </p:cNvPr>
+          <p:cNvSpPr>
+            <a:spLocks noGrp="1"/>
+          </p:cNvSpPr>
+          <p:nvPr>
+            <p:ph type="ftr" sz="quarter" idx="11"/>
+          </p:nvPr>
+        </p:nvSpPr>
+        <p:spPr/>
+        <p:txBody>
+          <a:bodyPr/>
+          <a:lstStyle/>
+          <a:p>
+            <a:r>
+              <a:rPr lang="en-US"/>
+              <a:t>Dr. Naveen Kumar, Associate Professor, AIIT, AUP</a:t>
+            </a:r>
           </a:p>
         </p:txBody>
       </p:sp>
@@ -46959,6 +50625,34 @@
           </a:p>
         </p:txBody>
       </p:sp>
+      <p:sp>
+        <p:nvSpPr>
+          <p:cNvPr id="2" name="Footer Placeholder 1">
+            <a:extLst>
+              <a:ext uri="{FF2B5EF4-FFF2-40B4-BE49-F238E27FC236}">
+                <a16:creationId xmlns:a16="http://schemas.microsoft.com/office/drawing/2014/main" id="{BDA49A1A-1545-F713-F52C-B0ED89A162E4}"/>
+              </a:ext>
+            </a:extLst>
+          </p:cNvPr>
+          <p:cNvSpPr>
+            <a:spLocks noGrp="1"/>
+          </p:cNvSpPr>
+          <p:nvPr>
+            <p:ph type="ftr" sz="quarter" idx="11"/>
+          </p:nvPr>
+        </p:nvSpPr>
+        <p:spPr/>
+        <p:txBody>
+          <a:bodyPr/>
+          <a:lstStyle/>
+          <a:p>
+            <a:r>
+              <a:rPr lang="en-US"/>
+              <a:t>Dr. Naveen Kumar, Associate Professor, AIIT, AUP</a:t>
+            </a:r>
+          </a:p>
+        </p:txBody>
+      </p:sp>
     </p:spTree>
     <p:extLst>
       <p:ext uri="{BB962C8B-B14F-4D97-AF65-F5344CB8AC3E}">
@@ -47545,6 +51239,34 @@
           <a:p>
             <a:pPr algn="ctr"/>
             <a:endParaRPr lang="en-US" dirty="0"/>
+          </a:p>
+        </p:txBody>
+      </p:sp>
+      <p:sp>
+        <p:nvSpPr>
+          <p:cNvPr id="2" name="Footer Placeholder 1">
+            <a:extLst>
+              <a:ext uri="{FF2B5EF4-FFF2-40B4-BE49-F238E27FC236}">
+                <a16:creationId xmlns:a16="http://schemas.microsoft.com/office/drawing/2014/main" id="{C145C0AA-67EE-56F1-C629-2B86BE347434}"/>
+              </a:ext>
+            </a:extLst>
+          </p:cNvPr>
+          <p:cNvSpPr>
+            <a:spLocks noGrp="1"/>
+          </p:cNvSpPr>
+          <p:nvPr>
+            <p:ph type="ftr" sz="quarter" idx="11"/>
+          </p:nvPr>
+        </p:nvSpPr>
+        <p:spPr/>
+        <p:txBody>
+          <a:bodyPr/>
+          <a:lstStyle/>
+          <a:p>
+            <a:r>
+              <a:rPr lang="en-US"/>
+              <a:t>Dr. Naveen Kumar, Associate Professor, AIIT, AUP</a:t>
+            </a:r>
           </a:p>
         </p:txBody>
       </p:sp>
@@ -47877,6 +51599,34 @@
           </a:p>
         </p:txBody>
       </p:sp>
+      <p:sp>
+        <p:nvSpPr>
+          <p:cNvPr id="4" name="Footer Placeholder 3">
+            <a:extLst>
+              <a:ext uri="{FF2B5EF4-FFF2-40B4-BE49-F238E27FC236}">
+                <a16:creationId xmlns:a16="http://schemas.microsoft.com/office/drawing/2014/main" id="{ADBBFF2D-58F4-9E47-31CA-0EED1A6D7C2D}"/>
+              </a:ext>
+            </a:extLst>
+          </p:cNvPr>
+          <p:cNvSpPr>
+            <a:spLocks noGrp="1"/>
+          </p:cNvSpPr>
+          <p:nvPr>
+            <p:ph type="ftr" sz="quarter" idx="11"/>
+          </p:nvPr>
+        </p:nvSpPr>
+        <p:spPr/>
+        <p:txBody>
+          <a:bodyPr/>
+          <a:lstStyle/>
+          <a:p>
+            <a:r>
+              <a:rPr lang="en-US"/>
+              <a:t>Dr. Naveen Kumar, Associate Professor, AIIT, AUP</a:t>
+            </a:r>
+          </a:p>
+        </p:txBody>
+      </p:sp>
     </p:spTree>
     <p:extLst>
       <p:ext uri="{BB962C8B-B14F-4D97-AF65-F5344CB8AC3E}">
@@ -48004,6 +51754,34 @@
           </a:extLst>
         </p:spPr>
       </p:pic>
+      <p:sp>
+        <p:nvSpPr>
+          <p:cNvPr id="4" name="Footer Placeholder 3">
+            <a:extLst>
+              <a:ext uri="{FF2B5EF4-FFF2-40B4-BE49-F238E27FC236}">
+                <a16:creationId xmlns:a16="http://schemas.microsoft.com/office/drawing/2014/main" id="{ED8A3FD0-3DA9-0F57-A364-94C856EFE3FD}"/>
+              </a:ext>
+            </a:extLst>
+          </p:cNvPr>
+          <p:cNvSpPr>
+            <a:spLocks noGrp="1"/>
+          </p:cNvSpPr>
+          <p:nvPr>
+            <p:ph type="ftr" sz="quarter" idx="11"/>
+          </p:nvPr>
+        </p:nvSpPr>
+        <p:spPr/>
+        <p:txBody>
+          <a:bodyPr/>
+          <a:lstStyle/>
+          <a:p>
+            <a:r>
+              <a:rPr lang="en-US"/>
+              <a:t>Dr. Naveen Kumar, Associate Professor, AIIT, AUP</a:t>
+            </a:r>
+          </a:p>
+        </p:txBody>
+      </p:sp>
     </p:spTree>
     <p:extLst>
       <p:ext uri="{BB962C8B-B14F-4D97-AF65-F5344CB8AC3E}">
@@ -48354,6 +52132,34 @@
           </a:extLst>
         </p:spPr>
       </p:pic>
+      <p:sp>
+        <p:nvSpPr>
+          <p:cNvPr id="4" name="Footer Placeholder 3">
+            <a:extLst>
+              <a:ext uri="{FF2B5EF4-FFF2-40B4-BE49-F238E27FC236}">
+                <a16:creationId xmlns:a16="http://schemas.microsoft.com/office/drawing/2014/main" id="{C4EB8738-8D7E-510D-B6F0-B352266B3787}"/>
+              </a:ext>
+            </a:extLst>
+          </p:cNvPr>
+          <p:cNvSpPr>
+            <a:spLocks noGrp="1"/>
+          </p:cNvSpPr>
+          <p:nvPr>
+            <p:ph type="ftr" sz="quarter" idx="11"/>
+          </p:nvPr>
+        </p:nvSpPr>
+        <p:spPr/>
+        <p:txBody>
+          <a:bodyPr/>
+          <a:lstStyle/>
+          <a:p>
+            <a:r>
+              <a:rPr lang="en-US"/>
+              <a:t>Dr. Naveen Kumar, Associate Professor, AIIT, AUP</a:t>
+            </a:r>
+          </a:p>
+        </p:txBody>
+      </p:sp>
     </p:spTree>
     <p:extLst>
       <p:ext uri="{BB962C8B-B14F-4D97-AF65-F5344CB8AC3E}">
@@ -48481,6 +52287,34 @@
           </a:extLst>
         </p:spPr>
       </p:pic>
+      <p:sp>
+        <p:nvSpPr>
+          <p:cNvPr id="4" name="Footer Placeholder 3">
+            <a:extLst>
+              <a:ext uri="{FF2B5EF4-FFF2-40B4-BE49-F238E27FC236}">
+                <a16:creationId xmlns:a16="http://schemas.microsoft.com/office/drawing/2014/main" id="{B6338FDF-E3AB-E9FD-AB92-0C6D91A7C254}"/>
+              </a:ext>
+            </a:extLst>
+          </p:cNvPr>
+          <p:cNvSpPr>
+            <a:spLocks noGrp="1"/>
+          </p:cNvSpPr>
+          <p:nvPr>
+            <p:ph type="ftr" sz="quarter" idx="11"/>
+          </p:nvPr>
+        </p:nvSpPr>
+        <p:spPr/>
+        <p:txBody>
+          <a:bodyPr/>
+          <a:lstStyle/>
+          <a:p>
+            <a:r>
+              <a:rPr lang="en-US"/>
+              <a:t>Dr. Naveen Kumar, Associate Professor, AIIT, AUP</a:t>
+            </a:r>
+          </a:p>
+        </p:txBody>
+      </p:sp>
     </p:spTree>
     <p:extLst>
       <p:ext uri="{BB962C8B-B14F-4D97-AF65-F5344CB8AC3E}">
@@ -48807,4 +52641,319 @@
     </a:ext>
   </a:extLst>
 </a:theme>
+</file>
+
+<file path=ppt/theme/theme2.xml><?xml version="1.0" encoding="utf-8"?>
+<a:theme xmlns:a="http://schemas.openxmlformats.org/drawingml/2006/main" name="Office Theme">
+  <a:themeElements>
+    <a:clrScheme name="Office">
+      <a:dk1>
+        <a:sysClr val="windowText" lastClr="000000"/>
+      </a:dk1>
+      <a:lt1>
+        <a:sysClr val="window" lastClr="FFFFFF"/>
+      </a:lt1>
+      <a:dk2>
+        <a:srgbClr val="0E2841"/>
+      </a:dk2>
+      <a:lt2>
+        <a:srgbClr val="E8E8E8"/>
+      </a:lt2>
+      <a:accent1>
+        <a:srgbClr val="156082"/>
+      </a:accent1>
+      <a:accent2>
+        <a:srgbClr val="E97132"/>
+      </a:accent2>
+      <a:accent3>
+        <a:srgbClr val="196B24"/>
+      </a:accent3>
+      <a:accent4>
+        <a:srgbClr val="0F9ED5"/>
+      </a:accent4>
+      <a:accent5>
+        <a:srgbClr val="A02B93"/>
+      </a:accent5>
+      <a:accent6>
+        <a:srgbClr val="4EA72E"/>
+      </a:accent6>
+      <a:hlink>
+        <a:srgbClr val="467886"/>
+      </a:hlink>
+      <a:folHlink>
+        <a:srgbClr val="96607D"/>
+      </a:folHlink>
+    </a:clrScheme>
+    <a:fontScheme name="Office">
+      <a:majorFont>
+        <a:latin typeface="Aptos Display" panose="02110004020202020204"/>
+        <a:ea typeface=""/>
+        <a:cs typeface=""/>
+        <a:font script="Jpan" typeface="游ゴシック Light"/>
+        <a:font script="Hang" typeface="맑은 고딕"/>
+        <a:font script="Hans" typeface="等线 Light"/>
+        <a:font script="Hant" typeface="新細明體"/>
+        <a:font script="Arab" typeface="Times New Roman"/>
+        <a:font script="Hebr" typeface="Times New Roman"/>
+        <a:font script="Thai" typeface="Angsana New"/>
+        <a:font script="Ethi" typeface="Nyala"/>
+        <a:font script="Beng" typeface="Vrinda"/>
+        <a:font script="Gujr" typeface="Shruti"/>
+        <a:font script="Khmr" typeface="MoolBoran"/>
+        <a:font script="Knda" typeface="Tunga"/>
+        <a:font script="Guru" typeface="Raavi"/>
+        <a:font script="Cans" typeface="Euphemia"/>
+        <a:font script="Cher" typeface="Plantagenet Cherokee"/>
+        <a:font script="Yiii" typeface="Microsoft Yi Baiti"/>
+        <a:font script="Tibt" typeface="Microsoft Himalaya"/>
+        <a:font script="Thaa" typeface="MV Boli"/>
+        <a:font script="Deva" typeface="Mangal"/>
+        <a:font script="Telu" typeface="Gautami"/>
+        <a:font script="Taml" typeface="Latha"/>
+        <a:font script="Syrc" typeface="Estrangelo Edessa"/>
+        <a:font script="Orya" typeface="Kalinga"/>
+        <a:font script="Mlym" typeface="Kartika"/>
+        <a:font script="Laoo" typeface="DokChampa"/>
+        <a:font script="Sinh" typeface="Iskoola Pota"/>
+        <a:font script="Mong" typeface="Mongolian Baiti"/>
+        <a:font script="Viet" typeface="Times New Roman"/>
+        <a:font script="Uigh" typeface="Microsoft Uighur"/>
+        <a:font script="Geor" typeface="Sylfaen"/>
+        <a:font script="Armn" typeface="Arial"/>
+        <a:font script="Bugi" typeface="Leelawadee UI"/>
+        <a:font script="Bopo" typeface="Microsoft JhengHei"/>
+        <a:font script="Java" typeface="Javanese Text"/>
+        <a:font script="Lisu" typeface="Segoe UI"/>
+        <a:font script="Mymr" typeface="Myanmar Text"/>
+        <a:font script="Nkoo" typeface="Ebrima"/>
+        <a:font script="Olck" typeface="Nirmala UI"/>
+        <a:font script="Osma" typeface="Ebrima"/>
+        <a:font script="Phag" typeface="Phagspa"/>
+        <a:font script="Syrn" typeface="Estrangelo Edessa"/>
+        <a:font script="Syrj" typeface="Estrangelo Edessa"/>
+        <a:font script="Syre" typeface="Estrangelo Edessa"/>
+        <a:font script="Sora" typeface="Nirmala UI"/>
+        <a:font script="Tale" typeface="Microsoft Tai Le"/>
+        <a:font script="Talu" typeface="Microsoft New Tai Lue"/>
+        <a:font script="Tfng" typeface="Ebrima"/>
+      </a:majorFont>
+      <a:minorFont>
+        <a:latin typeface="Aptos" panose="02110004020202020204"/>
+        <a:ea typeface=""/>
+        <a:cs typeface=""/>
+        <a:font script="Jpan" typeface="游ゴシック"/>
+        <a:font script="Hang" typeface="맑은 고딕"/>
+        <a:font script="Hans" typeface="等线"/>
+        <a:font script="Hant" typeface="新細明體"/>
+        <a:font script="Arab" typeface="Arial"/>
+        <a:font script="Hebr" typeface="Arial"/>
+        <a:font script="Thai" typeface="Cordia New"/>
+        <a:font script="Ethi" typeface="Nyala"/>
+        <a:font script="Beng" typeface="Vrinda"/>
+        <a:font script="Gujr" typeface="Shruti"/>
+        <a:font script="Khmr" typeface="DaunPenh"/>
+        <a:font script="Knda" typeface="Tunga"/>
+        <a:font script="Guru" typeface="Raavi"/>
+        <a:font script="Cans" typeface="Euphemia"/>
+        <a:font script="Cher" typeface="Plantagenet Cherokee"/>
+        <a:font script="Yiii" typeface="Microsoft Yi Baiti"/>
+        <a:font script="Tibt" typeface="Microsoft Himalaya"/>
+        <a:font script="Thaa" typeface="MV Boli"/>
+        <a:font script="Deva" typeface="Mangal"/>
+        <a:font script="Telu" typeface="Gautami"/>
+        <a:font script="Taml" typeface="Latha"/>
+        <a:font script="Syrc" typeface="Estrangelo Edessa"/>
+        <a:font script="Orya" typeface="Kalinga"/>
+        <a:font script="Mlym" typeface="Kartika"/>
+        <a:font script="Laoo" typeface="DokChampa"/>
+        <a:font script="Sinh" typeface="Iskoola Pota"/>
+        <a:font script="Mong" typeface="Mongolian Baiti"/>
+        <a:font script="Viet" typeface="Arial"/>
+        <a:font script="Uigh" typeface="Microsoft Uighur"/>
+        <a:font script="Geor" typeface="Sylfaen"/>
+        <a:font script="Armn" typeface="Arial"/>
+        <a:font script="Bugi" typeface="Leelawadee UI"/>
+        <a:font script="Bopo" typeface="Microsoft JhengHei"/>
+        <a:font script="Java" typeface="Javanese Text"/>
+        <a:font script="Lisu" typeface="Segoe UI"/>
+        <a:font script="Mymr" typeface="Myanmar Text"/>
+        <a:font script="Nkoo" typeface="Ebrima"/>
+        <a:font script="Olck" typeface="Nirmala UI"/>
+        <a:font script="Osma" typeface="Ebrima"/>
+        <a:font script="Phag" typeface="Phagspa"/>
+        <a:font script="Syrn" typeface="Estrangelo Edessa"/>
+        <a:font script="Syrj" typeface="Estrangelo Edessa"/>
+        <a:font script="Syre" typeface="Estrangelo Edessa"/>
+        <a:font script="Sora" typeface="Nirmala UI"/>
+        <a:font script="Tale" typeface="Microsoft Tai Le"/>
+        <a:font script="Talu" typeface="Microsoft New Tai Lue"/>
+        <a:font script="Tfng" typeface="Ebrima"/>
+      </a:minorFont>
+    </a:fontScheme>
+    <a:fmtScheme name="Office">
+      <a:fillStyleLst>
+        <a:solidFill>
+          <a:schemeClr val="phClr"/>
+        </a:solidFill>
+        <a:gradFill rotWithShape="1">
+          <a:gsLst>
+            <a:gs pos="0">
+              <a:schemeClr val="phClr">
+                <a:lumMod val="110000"/>
+                <a:satMod val="105000"/>
+                <a:tint val="67000"/>
+              </a:schemeClr>
+            </a:gs>
+            <a:gs pos="50000">
+              <a:schemeClr val="phClr">
+                <a:lumMod val="105000"/>
+                <a:satMod val="103000"/>
+                <a:tint val="73000"/>
+              </a:schemeClr>
+            </a:gs>
+            <a:gs pos="100000">
+              <a:schemeClr val="phClr">
+                <a:lumMod val="105000"/>
+                <a:satMod val="109000"/>
+                <a:tint val="81000"/>
+              </a:schemeClr>
+            </a:gs>
+          </a:gsLst>
+          <a:lin ang="5400000" scaled="0"/>
+        </a:gradFill>
+        <a:gradFill rotWithShape="1">
+          <a:gsLst>
+            <a:gs pos="0">
+              <a:schemeClr val="phClr">
+                <a:satMod val="103000"/>
+                <a:lumMod val="102000"/>
+                <a:tint val="94000"/>
+              </a:schemeClr>
+            </a:gs>
+            <a:gs pos="50000">
+              <a:schemeClr val="phClr">
+                <a:satMod val="110000"/>
+                <a:lumMod val="100000"/>
+                <a:shade val="100000"/>
+              </a:schemeClr>
+            </a:gs>
+            <a:gs pos="100000">
+              <a:schemeClr val="phClr">
+                <a:lumMod val="99000"/>
+                <a:satMod val="120000"/>
+                <a:shade val="78000"/>
+              </a:schemeClr>
+            </a:gs>
+          </a:gsLst>
+          <a:lin ang="5400000" scaled="0"/>
+        </a:gradFill>
+      </a:fillStyleLst>
+      <a:lnStyleLst>
+        <a:ln w="12700" cap="flat" cmpd="sng" algn="ctr">
+          <a:solidFill>
+            <a:schemeClr val="phClr"/>
+          </a:solidFill>
+          <a:prstDash val="solid"/>
+          <a:miter lim="800000"/>
+        </a:ln>
+        <a:ln w="19050" cap="flat" cmpd="sng" algn="ctr">
+          <a:solidFill>
+            <a:schemeClr val="phClr"/>
+          </a:solidFill>
+          <a:prstDash val="solid"/>
+          <a:miter lim="800000"/>
+        </a:ln>
+        <a:ln w="25400" cap="flat" cmpd="sng" algn="ctr">
+          <a:solidFill>
+            <a:schemeClr val="phClr"/>
+          </a:solidFill>
+          <a:prstDash val="solid"/>
+          <a:miter lim="800000"/>
+        </a:ln>
+      </a:lnStyleLst>
+      <a:effectStyleLst>
+        <a:effectStyle>
+          <a:effectLst/>
+        </a:effectStyle>
+        <a:effectStyle>
+          <a:effectLst/>
+        </a:effectStyle>
+        <a:effectStyle>
+          <a:effectLst>
+            <a:outerShdw blurRad="57150" dist="19050" dir="5400000" algn="ctr" rotWithShape="0">
+              <a:srgbClr val="000000">
+                <a:alpha val="63000"/>
+              </a:srgbClr>
+            </a:outerShdw>
+          </a:effectLst>
+        </a:effectStyle>
+      </a:effectStyleLst>
+      <a:bgFillStyleLst>
+        <a:solidFill>
+          <a:schemeClr val="phClr"/>
+        </a:solidFill>
+        <a:solidFill>
+          <a:schemeClr val="phClr">
+            <a:tint val="95000"/>
+            <a:satMod val="170000"/>
+          </a:schemeClr>
+        </a:solidFill>
+        <a:gradFill rotWithShape="1">
+          <a:gsLst>
+            <a:gs pos="0">
+              <a:schemeClr val="phClr">
+                <a:tint val="93000"/>
+                <a:satMod val="150000"/>
+                <a:shade val="98000"/>
+                <a:lumMod val="102000"/>
+              </a:schemeClr>
+            </a:gs>
+            <a:gs pos="50000">
+              <a:schemeClr val="phClr">
+                <a:tint val="98000"/>
+                <a:satMod val="130000"/>
+                <a:shade val="90000"/>
+                <a:lumMod val="103000"/>
+              </a:schemeClr>
+            </a:gs>
+            <a:gs pos="100000">
+              <a:schemeClr val="phClr">
+                <a:shade val="63000"/>
+                <a:satMod val="120000"/>
+              </a:schemeClr>
+            </a:gs>
+          </a:gsLst>
+          <a:lin ang="5400000" scaled="0"/>
+        </a:gradFill>
+      </a:bgFillStyleLst>
+    </a:fmtScheme>
+  </a:themeElements>
+  <a:objectDefaults>
+    <a:lnDef>
+      <a:spPr/>
+      <a:bodyPr/>
+      <a:lstStyle/>
+      <a:style>
+        <a:lnRef idx="2">
+          <a:schemeClr val="accent1"/>
+        </a:lnRef>
+        <a:fillRef idx="0">
+          <a:schemeClr val="accent1"/>
+        </a:fillRef>
+        <a:effectRef idx="1">
+          <a:schemeClr val="accent1"/>
+        </a:effectRef>
+        <a:fontRef idx="minor">
+          <a:schemeClr val="tx1"/>
+        </a:fontRef>
+      </a:style>
+    </a:lnDef>
+  </a:objectDefaults>
+  <a:extraClrSchemeLst/>
+  <a:extLst>
+    <a:ext uri="{05A4C25C-085E-4340-85A3-A5531E510DB2}">
+      <thm15:themeFamily xmlns:thm15="http://schemas.microsoft.com/office/thememl/2012/main" name="Office Theme" id="{2E142A2C-CD16-42D6-873A-C26D2A0506FA}" vid="{1BDDFF52-6CD6-40A5-AB3C-68EB2F1E4D0A}"/>
+    </a:ext>
+  </a:extLst>
+</a:theme>
 </file>